--- a/public/lessons/year-6-maths/autumn/week-3/multiply-up-to-four-digits-by-two-digits/teaching-powerpoint-v1.pptx
+++ b/public/lessons/year-6-maths/autumn/week-3/multiply-up-to-four-digits-by-two-digits/teaching-powerpoint-v1.pptx
@@ -2,24 +2,24 @@
 <file path=ppt/presentation.xml><?xml version="1.0" encoding="utf-8"?>
 <p:presentation xmlns:p="http://schemas.openxmlformats.org/presentationml/2006/main">
   <p:sldMasterIdLst>
-    <p:sldMasterId xmlns:r="http://schemas.openxmlformats.org/officeDocument/2006/relationships" id="2147483648" r:id="R10170979f0174980"/>
+    <p:sldMasterId xmlns:r="http://schemas.openxmlformats.org/officeDocument/2006/relationships" id="2147483648" r:id="R3b8553eb88234af8"/>
   </p:sldMasterIdLst>
   <p:notesMasterIdLst>
-    <p:notesMasterId xmlns:r="http://schemas.openxmlformats.org/officeDocument/2006/relationships" r:id="Rc4fdccebb3a54db9"/>
+    <p:notesMasterId xmlns:r="http://schemas.openxmlformats.org/officeDocument/2006/relationships" r:id="R835cc8861b504448"/>
   </p:notesMasterIdLst>
   <p:sldIdLst>
-    <p:sldId xmlns:r="http://schemas.openxmlformats.org/officeDocument/2006/relationships" id="256" r:id="R9e6d07f358aa4727"/>
-    <p:sldId xmlns:r="http://schemas.openxmlformats.org/officeDocument/2006/relationships" id="257" r:id="Ra2aa458d32d544d1"/>
-    <p:sldId xmlns:r="http://schemas.openxmlformats.org/officeDocument/2006/relationships" id="258" r:id="Ra07618af16754a11"/>
-    <p:sldId xmlns:r="http://schemas.openxmlformats.org/officeDocument/2006/relationships" id="259" r:id="R6a8ee3413ca3439c"/>
-    <p:sldId xmlns:r="http://schemas.openxmlformats.org/officeDocument/2006/relationships" id="260" r:id="R66257b8d1d1947ac"/>
-    <p:sldId xmlns:r="http://schemas.openxmlformats.org/officeDocument/2006/relationships" id="261" r:id="R4eb11523b17d435e"/>
-    <p:sldId xmlns:r="http://schemas.openxmlformats.org/officeDocument/2006/relationships" id="262" r:id="Rb192c91bb4d34cc8"/>
-    <p:sldId xmlns:r="http://schemas.openxmlformats.org/officeDocument/2006/relationships" id="263" r:id="Rfa8e9244657949ab"/>
-    <p:sldId xmlns:r="http://schemas.openxmlformats.org/officeDocument/2006/relationships" id="264" r:id="R6671d7de4a914738"/>
-    <p:sldId xmlns:r="http://schemas.openxmlformats.org/officeDocument/2006/relationships" id="265" r:id="R060bc5c52fed4e37"/>
-    <p:sldId xmlns:r="http://schemas.openxmlformats.org/officeDocument/2006/relationships" id="266" r:id="R64d940fd461e47f5"/>
-    <p:sldId xmlns:r="http://schemas.openxmlformats.org/officeDocument/2006/relationships" id="267" r:id="Rbd18b27901634493"/>
+    <p:sldId xmlns:r="http://schemas.openxmlformats.org/officeDocument/2006/relationships" id="256" r:id="R5e3a4f57738142e9"/>
+    <p:sldId xmlns:r="http://schemas.openxmlformats.org/officeDocument/2006/relationships" id="257" r:id="R162b8639a10445f6"/>
+    <p:sldId xmlns:r="http://schemas.openxmlformats.org/officeDocument/2006/relationships" id="258" r:id="Ra40324f3b3c54aec"/>
+    <p:sldId xmlns:r="http://schemas.openxmlformats.org/officeDocument/2006/relationships" id="259" r:id="R4a09b953366b45ab"/>
+    <p:sldId xmlns:r="http://schemas.openxmlformats.org/officeDocument/2006/relationships" id="260" r:id="Rcd33c19f72f740e1"/>
+    <p:sldId xmlns:r="http://schemas.openxmlformats.org/officeDocument/2006/relationships" id="261" r:id="R80c8209b6e854c3a"/>
+    <p:sldId xmlns:r="http://schemas.openxmlformats.org/officeDocument/2006/relationships" id="262" r:id="Rc59faf33a4664d75"/>
+    <p:sldId xmlns:r="http://schemas.openxmlformats.org/officeDocument/2006/relationships" id="263" r:id="R371679aa44384327"/>
+    <p:sldId xmlns:r="http://schemas.openxmlformats.org/officeDocument/2006/relationships" id="264" r:id="R675767bbf13242be"/>
+    <p:sldId xmlns:r="http://schemas.openxmlformats.org/officeDocument/2006/relationships" id="265" r:id="Rc28728f00c9540aa"/>
+    <p:sldId xmlns:r="http://schemas.openxmlformats.org/officeDocument/2006/relationships" id="266" r:id="R7f5d2b4bbb32456d"/>
+    <p:sldId xmlns:r="http://schemas.openxmlformats.org/officeDocument/2006/relationships" id="267" r:id="Re7466761692447c3"/>
   </p:sldIdLst>
   <p:sldSz cx="12192000" cy="6858000"/>
   <p:notesSz cx="6858000" cy="9144000"/>
@@ -873,7 +873,7 @@
           <a:lstStyle xmlns:a="http://schemas.openxmlformats.org/drawingml/2006/main"/>
           <a:p xmlns:a="http://schemas.openxmlformats.org/drawingml/2006/main">
             <a:r>
-              <a:t>I do. Reveal the question, setup and each calculation stage one click at a time. Pupils watch before copying. Model answer: 62,208.</a:t>
+              <a:t>I do. Reveal the question, then reveal each mathematical change one click at a time. Point to the numbers and operation that changed before moving to the next line. Final answer: 62,208.</a:t>
             </a:r>
           </a:p>
         </p:txBody>
@@ -1291,7 +1291,7 @@
   </p:cSld>
   <p:clrMap bg1="lt1" tx1="dk1" bg2="lt2" tx2="dk2" accent1="accent1" accent2="accent2" accent3="accent3" accent4="accent4" accent5="accent5" accent6="accent6" hlink="hlink" folHlink="folHlink"/>
   <p:sldLayoutIdLst>
-    <p:sldLayoutId xmlns:r="http://schemas.openxmlformats.org/officeDocument/2006/relationships" id="2147483649" r:id="Rb17217aa1e6949c1"/>
+    <p:sldLayoutId xmlns:r="http://schemas.openxmlformats.org/officeDocument/2006/relationships" id="2147483649" r:id="Rf3d2e9f464be4fe1"/>
   </p:sldLayoutIdLst>
   <p:txStyles>
     <p:titleStyle>
@@ -1842,7 +1842,7 @@
           <p:cNvPr id="12" name="">
             <a:extLst xmlns:a="http://schemas.openxmlformats.org/drawingml/2006/main">
               <a:ext uri="{FF2B5EF4-FFF2-40B4-BE49-F238E27FC236}">
-                <a16:creationId xmlns:a16="http://schemas.microsoft.com/office/drawing/2014/main" id="{933CD136-CCF7-467B-AD33-588FB3C719FF}"/>
+                <a16:creationId xmlns:a16="http://schemas.microsoft.com/office/drawing/2014/main" id="{F38EDE1C-D90E-43AA-9FCC-13DF95A6AB47}"/>
               </a:ext>
             </a:extLst>
           </p:cNvPr>
@@ -1874,7 +1874,7 @@
           <p:cNvPr id="2" name="">
             <a:extLst xmlns:a="http://schemas.openxmlformats.org/drawingml/2006/main">
               <a:ext uri="{FF2B5EF4-FFF2-40B4-BE49-F238E27FC236}">
-                <a16:creationId xmlns:a16="http://schemas.microsoft.com/office/drawing/2014/main" id="{D2956A06-529A-4561-9C81-B4230400C0D0}"/>
+                <a16:creationId xmlns:a16="http://schemas.microsoft.com/office/drawing/2014/main" id="{ED8DFF7D-0973-454D-A0A7-5784511F37AD}"/>
               </a:ext>
             </a:extLst>
           </p:cNvPr>
@@ -1931,7 +1931,7 @@
           <p:cNvPr id="3" name="">
             <a:extLst xmlns:a="http://schemas.openxmlformats.org/drawingml/2006/main">
               <a:ext uri="{FF2B5EF4-FFF2-40B4-BE49-F238E27FC236}">
-                <a16:creationId xmlns:a16="http://schemas.microsoft.com/office/drawing/2014/main" id="{F6D741DC-2086-4A25-B617-58C3551640FF}"/>
+                <a16:creationId xmlns:a16="http://schemas.microsoft.com/office/drawing/2014/main" id="{D14D7AAA-4568-470D-8C83-BA2E487A27BE}"/>
               </a:ext>
             </a:extLst>
           </p:cNvPr>
@@ -1965,7 +1965,7 @@
           <p:cNvPr id="4" name="">
             <a:extLst xmlns:a="http://schemas.openxmlformats.org/drawingml/2006/main">
               <a:ext uri="{FF2B5EF4-FFF2-40B4-BE49-F238E27FC236}">
-                <a16:creationId xmlns:a16="http://schemas.microsoft.com/office/drawing/2014/main" id="{F9393478-4EAE-4C5B-AA01-C358282A153A}"/>
+                <a16:creationId xmlns:a16="http://schemas.microsoft.com/office/drawing/2014/main" id="{C9CFA38C-17E9-4623-AA2E-F54831A058AB}"/>
               </a:ext>
             </a:extLst>
           </p:cNvPr>
@@ -2022,7 +2022,7 @@
           <p:cNvPr id="5" name="">
             <a:extLst xmlns:a="http://schemas.openxmlformats.org/drawingml/2006/main">
               <a:ext uri="{FF2B5EF4-FFF2-40B4-BE49-F238E27FC236}">
-                <a16:creationId xmlns:a16="http://schemas.microsoft.com/office/drawing/2014/main" id="{4AC4F5DB-EB37-4047-A510-26ACEFA9AC30}"/>
+                <a16:creationId xmlns:a16="http://schemas.microsoft.com/office/drawing/2014/main" id="{D47A257B-6883-4689-8173-BDDC2D1E8608}"/>
               </a:ext>
             </a:extLst>
           </p:cNvPr>
@@ -2079,7 +2079,7 @@
           <p:cNvPr id="6" name="">
             <a:extLst xmlns:a="http://schemas.openxmlformats.org/drawingml/2006/main">
               <a:ext uri="{FF2B5EF4-FFF2-40B4-BE49-F238E27FC236}">
-                <a16:creationId xmlns:a16="http://schemas.microsoft.com/office/drawing/2014/main" id="{0164DA3F-330D-4AA0-A6C2-298084B484CB}"/>
+                <a16:creationId xmlns:a16="http://schemas.microsoft.com/office/drawing/2014/main" id="{53DABCF3-F9BF-4E24-88A2-A8DD5A9BA3C0}"/>
               </a:ext>
             </a:extLst>
           </p:cNvPr>
@@ -2113,7 +2113,7 @@
           <p:cNvPr id="7" name="">
             <a:extLst xmlns:a="http://schemas.openxmlformats.org/drawingml/2006/main">
               <a:ext uri="{FF2B5EF4-FFF2-40B4-BE49-F238E27FC236}">
-                <a16:creationId xmlns:a16="http://schemas.microsoft.com/office/drawing/2014/main" id="{9C63D7C3-AEC6-4F7F-A5E5-8C7AA2E49058}"/>
+                <a16:creationId xmlns:a16="http://schemas.microsoft.com/office/drawing/2014/main" id="{473F8D52-9F57-4426-B41E-B7A7FB6043F6}"/>
               </a:ext>
             </a:extLst>
           </p:cNvPr>
@@ -2170,7 +2170,7 @@
           <p:cNvPr id="8" name="">
             <a:extLst xmlns:a="http://schemas.openxmlformats.org/drawingml/2006/main">
               <a:ext uri="{FF2B5EF4-FFF2-40B4-BE49-F238E27FC236}">
-                <a16:creationId xmlns:a16="http://schemas.microsoft.com/office/drawing/2014/main" id="{89030862-995C-41E9-9CF2-0807B75B599E}"/>
+                <a16:creationId xmlns:a16="http://schemas.microsoft.com/office/drawing/2014/main" id="{A7174233-FD26-42F3-BB55-3A451C7719BD}"/>
               </a:ext>
             </a:extLst>
           </p:cNvPr>
@@ -2227,7 +2227,7 @@
           <p:cNvPr id="9" name="">
             <a:extLst xmlns:a="http://schemas.openxmlformats.org/drawingml/2006/main">
               <a:ext uri="{FF2B5EF4-FFF2-40B4-BE49-F238E27FC236}">
-                <a16:creationId xmlns:a16="http://schemas.microsoft.com/office/drawing/2014/main" id="{210BA9BD-3839-4679-B02F-41948D1C7F77}"/>
+                <a16:creationId xmlns:a16="http://schemas.microsoft.com/office/drawing/2014/main" id="{D3E79298-9672-476F-B29F-A9BBEAD4FA6F}"/>
               </a:ext>
             </a:extLst>
           </p:cNvPr>
@@ -2284,7 +2284,7 @@
           <p:cNvPr id="10" name="">
             <a:extLst xmlns:a="http://schemas.openxmlformats.org/drawingml/2006/main">
               <a:ext uri="{FF2B5EF4-FFF2-40B4-BE49-F238E27FC236}">
-                <a16:creationId xmlns:a16="http://schemas.microsoft.com/office/drawing/2014/main" id="{0939E78B-627E-4F24-A12E-153F51F3B9C6}"/>
+                <a16:creationId xmlns:a16="http://schemas.microsoft.com/office/drawing/2014/main" id="{FEBEE250-CF51-4880-9182-977FF9FEEE68}"/>
               </a:ext>
             </a:extLst>
           </p:cNvPr>
@@ -2341,7 +2341,7 @@
           <p:cNvPr id="11" name="">
             <a:extLst xmlns:a="http://schemas.openxmlformats.org/drawingml/2006/main">
               <a:ext uri="{FF2B5EF4-FFF2-40B4-BE49-F238E27FC236}">
-                <a16:creationId xmlns:a16="http://schemas.microsoft.com/office/drawing/2014/main" id="{9425B2B2-A73A-4E04-AFAC-61757BC8B997}"/>
+                <a16:creationId xmlns:a16="http://schemas.microsoft.com/office/drawing/2014/main" id="{18A920D6-AFE7-41FF-853E-2EB5C469DBB4}"/>
               </a:ext>
             </a:extLst>
           </p:cNvPr>
@@ -2396,7 +2396,7 @@
     </p:spTree>
     <p:extLst>
       <p:ext uri="{BB962C8B-B14F-4D97-AF65-F5344CB8AC3E}">
-        <p14:creationId xmlns:p14="http://schemas.microsoft.com/office/powerpoint/2010/main" val="926150808"/>
+        <p14:creationId xmlns:p14="http://schemas.microsoft.com/office/powerpoint/2010/main" val="135974222"/>
       </p:ext>
     </p:extLst>
   </p:cSld>
@@ -2427,7 +2427,7 @@
           <p:cNvPr id="14" name="">
             <a:extLst xmlns:a="http://schemas.openxmlformats.org/drawingml/2006/main">
               <a:ext uri="{FF2B5EF4-FFF2-40B4-BE49-F238E27FC236}">
-                <a16:creationId xmlns:a16="http://schemas.microsoft.com/office/drawing/2014/main" id="{D9D0B2CE-0853-4C88-8B5A-3472A39D9EA2}"/>
+                <a16:creationId xmlns:a16="http://schemas.microsoft.com/office/drawing/2014/main" id="{7BEC941F-12CE-4486-9086-3F68C2ECFE92}"/>
               </a:ext>
             </a:extLst>
           </p:cNvPr>
@@ -2459,7 +2459,7 @@
           <p:cNvPr id="2" name="">
             <a:extLst xmlns:a="http://schemas.openxmlformats.org/drawingml/2006/main">
               <a:ext uri="{FF2B5EF4-FFF2-40B4-BE49-F238E27FC236}">
-                <a16:creationId xmlns:a16="http://schemas.microsoft.com/office/drawing/2014/main" id="{4F3A732F-FF9D-446E-B409-61E1E82C2386}"/>
+                <a16:creationId xmlns:a16="http://schemas.microsoft.com/office/drawing/2014/main" id="{7BBA6F5F-1233-41E5-9288-0D3FDC71F051}"/>
               </a:ext>
             </a:extLst>
           </p:cNvPr>
@@ -2516,7 +2516,7 @@
           <p:cNvPr id="3" name="">
             <a:extLst xmlns:a="http://schemas.openxmlformats.org/drawingml/2006/main">
               <a:ext uri="{FF2B5EF4-FFF2-40B4-BE49-F238E27FC236}">
-                <a16:creationId xmlns:a16="http://schemas.microsoft.com/office/drawing/2014/main" id="{17169AB8-FD80-47AA-8C54-4E6813D8435B}"/>
+                <a16:creationId xmlns:a16="http://schemas.microsoft.com/office/drawing/2014/main" id="{DEF05E71-F05D-4037-8B92-FE37909A70E2}"/>
               </a:ext>
             </a:extLst>
           </p:cNvPr>
@@ -2548,7 +2548,7 @@
           <p:cNvPr id="4" name="">
             <a:extLst xmlns:a="http://schemas.openxmlformats.org/drawingml/2006/main">
               <a:ext uri="{FF2B5EF4-FFF2-40B4-BE49-F238E27FC236}">
-                <a16:creationId xmlns:a16="http://schemas.microsoft.com/office/drawing/2014/main" id="{E86E8DA4-5FA2-43CC-BFF7-BBDFFC92455E}"/>
+                <a16:creationId xmlns:a16="http://schemas.microsoft.com/office/drawing/2014/main" id="{02FB677C-A6D7-4A98-B1BB-49AA57F8E61C}"/>
               </a:ext>
             </a:extLst>
           </p:cNvPr>
@@ -2605,7 +2605,7 @@
           <p:cNvPr id="5" name="">
             <a:extLst xmlns:a="http://schemas.openxmlformats.org/drawingml/2006/main">
               <a:ext uri="{FF2B5EF4-FFF2-40B4-BE49-F238E27FC236}">
-                <a16:creationId xmlns:a16="http://schemas.microsoft.com/office/drawing/2014/main" id="{5F791A6D-4EB3-418C-BF1C-45D144603374}"/>
+                <a16:creationId xmlns:a16="http://schemas.microsoft.com/office/drawing/2014/main" id="{2BBECF65-F660-49A2-9FB0-C3D630F5FE74}"/>
               </a:ext>
             </a:extLst>
           </p:cNvPr>
@@ -2662,7 +2662,7 @@
           <p:cNvPr id="6" name="">
             <a:extLst xmlns:a="http://schemas.openxmlformats.org/drawingml/2006/main">
               <a:ext uri="{FF2B5EF4-FFF2-40B4-BE49-F238E27FC236}">
-                <a16:creationId xmlns:a16="http://schemas.microsoft.com/office/drawing/2014/main" id="{0050A4FE-CE66-4DCE-AFF1-25F560E3A719}"/>
+                <a16:creationId xmlns:a16="http://schemas.microsoft.com/office/drawing/2014/main" id="{1B1226EA-4F99-4C1F-B43D-91C3F5CC939F}"/>
               </a:ext>
             </a:extLst>
           </p:cNvPr>
@@ -2719,7 +2719,7 @@
           <p:cNvPr id="7" name="">
             <a:extLst xmlns:a="http://schemas.openxmlformats.org/drawingml/2006/main">
               <a:ext uri="{FF2B5EF4-FFF2-40B4-BE49-F238E27FC236}">
-                <a16:creationId xmlns:a16="http://schemas.microsoft.com/office/drawing/2014/main" id="{CD09889E-9D7A-46E4-9B44-457DAB321129}"/>
+                <a16:creationId xmlns:a16="http://schemas.microsoft.com/office/drawing/2014/main" id="{05ABDEBC-9F21-43F6-A64C-62EA708285E8}"/>
               </a:ext>
             </a:extLst>
           </p:cNvPr>
@@ -2751,7 +2751,7 @@
           <p:cNvPr id="8" name="">
             <a:extLst xmlns:a="http://schemas.openxmlformats.org/drawingml/2006/main">
               <a:ext uri="{FF2B5EF4-FFF2-40B4-BE49-F238E27FC236}">
-                <a16:creationId xmlns:a16="http://schemas.microsoft.com/office/drawing/2014/main" id="{8CD78BF4-AA09-4084-99FB-56641D8A5035}"/>
+                <a16:creationId xmlns:a16="http://schemas.microsoft.com/office/drawing/2014/main" id="{EF6082AE-E667-4284-81FE-A539DBC41925}"/>
               </a:ext>
             </a:extLst>
           </p:cNvPr>
@@ -2808,7 +2808,7 @@
           <p:cNvPr id="9" name="">
             <a:extLst xmlns:a="http://schemas.openxmlformats.org/drawingml/2006/main">
               <a:ext uri="{FF2B5EF4-FFF2-40B4-BE49-F238E27FC236}">
-                <a16:creationId xmlns:a16="http://schemas.microsoft.com/office/drawing/2014/main" id="{3A944DC5-2D32-4358-A297-012251926237}"/>
+                <a16:creationId xmlns:a16="http://schemas.microsoft.com/office/drawing/2014/main" id="{0B6F64D7-9C6F-4D1B-A400-E0F59E3DCBB8}"/>
               </a:ext>
             </a:extLst>
           </p:cNvPr>
@@ -2865,7 +2865,7 @@
           <p:cNvPr id="10" name="">
             <a:extLst xmlns:a="http://schemas.openxmlformats.org/drawingml/2006/main">
               <a:ext uri="{FF2B5EF4-FFF2-40B4-BE49-F238E27FC236}">
-                <a16:creationId xmlns:a16="http://schemas.microsoft.com/office/drawing/2014/main" id="{73FF2C0B-E464-4B9F-BC5C-EE4558C391B5}"/>
+                <a16:creationId xmlns:a16="http://schemas.microsoft.com/office/drawing/2014/main" id="{14D99553-61E4-4831-8734-C3059A6BCAB5}"/>
               </a:ext>
             </a:extLst>
           </p:cNvPr>
@@ -2922,7 +2922,7 @@
           <p:cNvPr id="11" name="">
             <a:extLst xmlns:a="http://schemas.openxmlformats.org/drawingml/2006/main">
               <a:ext uri="{FF2B5EF4-FFF2-40B4-BE49-F238E27FC236}">
-                <a16:creationId xmlns:a16="http://schemas.microsoft.com/office/drawing/2014/main" id="{82B8500B-A5B7-4FB6-9BC6-FCFB6C046A73}"/>
+                <a16:creationId xmlns:a16="http://schemas.microsoft.com/office/drawing/2014/main" id="{67721659-1900-4309-947A-709D172BC97D}"/>
               </a:ext>
             </a:extLst>
           </p:cNvPr>
@@ -2979,7 +2979,7 @@
           <p:cNvPr id="12" name="">
             <a:extLst xmlns:a="http://schemas.openxmlformats.org/drawingml/2006/main">
               <a:ext uri="{FF2B5EF4-FFF2-40B4-BE49-F238E27FC236}">
-                <a16:creationId xmlns:a16="http://schemas.microsoft.com/office/drawing/2014/main" id="{61F64BD9-A1E8-4AE5-8753-E9CDBF7623BC}"/>
+                <a16:creationId xmlns:a16="http://schemas.microsoft.com/office/drawing/2014/main" id="{361B32D2-9B8C-478A-ADE9-E10CF2846E70}"/>
               </a:ext>
             </a:extLst>
           </p:cNvPr>
@@ -3036,7 +3036,7 @@
           <p:cNvPr id="13" name="">
             <a:extLst xmlns:a="http://schemas.openxmlformats.org/drawingml/2006/main">
               <a:ext uri="{FF2B5EF4-FFF2-40B4-BE49-F238E27FC236}">
-                <a16:creationId xmlns:a16="http://schemas.microsoft.com/office/drawing/2014/main" id="{7286CA22-AA35-4FA9-944D-BBBCEDAF80F6}"/>
+                <a16:creationId xmlns:a16="http://schemas.microsoft.com/office/drawing/2014/main" id="{8AD30DA9-6D9F-4ADE-B2CA-1843DFC61BD1}"/>
               </a:ext>
             </a:extLst>
           </p:cNvPr>
@@ -3091,7 +3091,7 @@
     </p:spTree>
     <p:extLst>
       <p:ext uri="{BB962C8B-B14F-4D97-AF65-F5344CB8AC3E}">
-        <p14:creationId xmlns:p14="http://schemas.microsoft.com/office/powerpoint/2010/main" val="1261321030"/>
+        <p14:creationId xmlns:p14="http://schemas.microsoft.com/office/powerpoint/2010/main" val="1135443062"/>
       </p:ext>
     </p:extLst>
   </p:cSld>
@@ -3292,7 +3292,7 @@
           <p:cNvPr id="19" name="">
             <a:extLst xmlns:a="http://schemas.openxmlformats.org/drawingml/2006/main">
               <a:ext uri="{FF2B5EF4-FFF2-40B4-BE49-F238E27FC236}">
-                <a16:creationId xmlns:a16="http://schemas.microsoft.com/office/drawing/2014/main" id="{F80D3BE2-C507-478B-961D-86DF0660FC23}"/>
+                <a16:creationId xmlns:a16="http://schemas.microsoft.com/office/drawing/2014/main" id="{D9D3069A-2883-47CA-8FB3-B745F4D5BD59}"/>
               </a:ext>
             </a:extLst>
           </p:cNvPr>
@@ -3324,7 +3324,7 @@
           <p:cNvPr id="2" name="">
             <a:extLst xmlns:a="http://schemas.openxmlformats.org/drawingml/2006/main">
               <a:ext uri="{FF2B5EF4-FFF2-40B4-BE49-F238E27FC236}">
-                <a16:creationId xmlns:a16="http://schemas.microsoft.com/office/drawing/2014/main" id="{E2AA4A97-D2E5-4C35-A1D9-FC4629F601F0}"/>
+                <a16:creationId xmlns:a16="http://schemas.microsoft.com/office/drawing/2014/main" id="{77BA31E5-7100-494C-ABBD-B66D7E9D80F8}"/>
               </a:ext>
             </a:extLst>
           </p:cNvPr>
@@ -3381,7 +3381,7 @@
           <p:cNvPr id="3" name="">
             <a:extLst xmlns:a="http://schemas.openxmlformats.org/drawingml/2006/main">
               <a:ext uri="{FF2B5EF4-FFF2-40B4-BE49-F238E27FC236}">
-                <a16:creationId xmlns:a16="http://schemas.microsoft.com/office/drawing/2014/main" id="{062759B7-993A-4731-BA31-FB537D5B97D7}"/>
+                <a16:creationId xmlns:a16="http://schemas.microsoft.com/office/drawing/2014/main" id="{D3C528DB-C1EF-4DE8-8327-25516DFFB2B8}"/>
               </a:ext>
             </a:extLst>
           </p:cNvPr>
@@ -3413,7 +3413,7 @@
           <p:cNvPr id="4" name="">
             <a:extLst xmlns:a="http://schemas.openxmlformats.org/drawingml/2006/main">
               <a:ext uri="{FF2B5EF4-FFF2-40B4-BE49-F238E27FC236}">
-                <a16:creationId xmlns:a16="http://schemas.microsoft.com/office/drawing/2014/main" id="{F2120E2E-3947-4D47-A329-03076B5732B7}"/>
+                <a16:creationId xmlns:a16="http://schemas.microsoft.com/office/drawing/2014/main" id="{983AA614-73B7-44B2-93D1-27E09FE8F4D5}"/>
               </a:ext>
             </a:extLst>
           </p:cNvPr>
@@ -3470,7 +3470,7 @@
           <p:cNvPr id="5" name="">
             <a:extLst xmlns:a="http://schemas.openxmlformats.org/drawingml/2006/main">
               <a:ext uri="{FF2B5EF4-FFF2-40B4-BE49-F238E27FC236}">
-                <a16:creationId xmlns:a16="http://schemas.microsoft.com/office/drawing/2014/main" id="{F0FB293D-720F-484F-B283-BE9F81625607}"/>
+                <a16:creationId xmlns:a16="http://schemas.microsoft.com/office/drawing/2014/main" id="{DD63FECB-BB5E-412E-BD55-1026A0A65757}"/>
               </a:ext>
             </a:extLst>
           </p:cNvPr>
@@ -3527,7 +3527,7 @@
           <p:cNvPr id="6" name="">
             <a:extLst xmlns:a="http://schemas.openxmlformats.org/drawingml/2006/main">
               <a:ext uri="{FF2B5EF4-FFF2-40B4-BE49-F238E27FC236}">
-                <a16:creationId xmlns:a16="http://schemas.microsoft.com/office/drawing/2014/main" id="{A92ED0C2-A868-4291-B696-6B40BE84D7AB}"/>
+                <a16:creationId xmlns:a16="http://schemas.microsoft.com/office/drawing/2014/main" id="{AB65468B-7656-4B9C-9AA3-9A31CC934307}"/>
               </a:ext>
             </a:extLst>
           </p:cNvPr>
@@ -3584,7 +3584,7 @@
           <p:cNvPr id="7" name="">
             <a:extLst xmlns:a="http://schemas.openxmlformats.org/drawingml/2006/main">
               <a:ext uri="{FF2B5EF4-FFF2-40B4-BE49-F238E27FC236}">
-                <a16:creationId xmlns:a16="http://schemas.microsoft.com/office/drawing/2014/main" id="{0EA7F38F-AFD2-4B3E-BD69-D5247FE4D91E}"/>
+                <a16:creationId xmlns:a16="http://schemas.microsoft.com/office/drawing/2014/main" id="{0801C5B1-9683-48C1-A10E-30E9AEACB4A4}"/>
               </a:ext>
             </a:extLst>
           </p:cNvPr>
@@ -3616,7 +3616,7 @@
           <p:cNvPr id="8" name="">
             <a:extLst xmlns:a="http://schemas.openxmlformats.org/drawingml/2006/main">
               <a:ext uri="{FF2B5EF4-FFF2-40B4-BE49-F238E27FC236}">
-                <a16:creationId xmlns:a16="http://schemas.microsoft.com/office/drawing/2014/main" id="{8C7E2B86-D7EE-468A-AAA1-949848B61734}"/>
+                <a16:creationId xmlns:a16="http://schemas.microsoft.com/office/drawing/2014/main" id="{558EB5E6-2A7A-40AD-8571-A49A02BE52FF}"/>
               </a:ext>
             </a:extLst>
           </p:cNvPr>
@@ -3673,7 +3673,7 @@
           <p:cNvPr id="9" name="">
             <a:extLst xmlns:a="http://schemas.openxmlformats.org/drawingml/2006/main">
               <a:ext uri="{FF2B5EF4-FFF2-40B4-BE49-F238E27FC236}">
-                <a16:creationId xmlns:a16="http://schemas.microsoft.com/office/drawing/2014/main" id="{A4DD32B5-BC42-4E63-8215-2D4097B45017}"/>
+                <a16:creationId xmlns:a16="http://schemas.microsoft.com/office/drawing/2014/main" id="{6E73551C-EE94-4C9C-8494-D12FF9596809}"/>
               </a:ext>
             </a:extLst>
           </p:cNvPr>
@@ -3730,7 +3730,7 @@
           <p:cNvPr id="10" name="">
             <a:extLst xmlns:a="http://schemas.openxmlformats.org/drawingml/2006/main">
               <a:ext uri="{FF2B5EF4-FFF2-40B4-BE49-F238E27FC236}">
-                <a16:creationId xmlns:a16="http://schemas.microsoft.com/office/drawing/2014/main" id="{0594786F-F89F-4C15-85AF-D415500C255C}"/>
+                <a16:creationId xmlns:a16="http://schemas.microsoft.com/office/drawing/2014/main" id="{65EE702F-12F8-4C3B-8DE3-45D5941FCA67}"/>
               </a:ext>
             </a:extLst>
           </p:cNvPr>
@@ -3787,7 +3787,7 @@
           <p:cNvPr id="11" name="">
             <a:extLst xmlns:a="http://schemas.openxmlformats.org/drawingml/2006/main">
               <a:ext uri="{FF2B5EF4-FFF2-40B4-BE49-F238E27FC236}">
-                <a16:creationId xmlns:a16="http://schemas.microsoft.com/office/drawing/2014/main" id="{0B2F8252-A34C-4925-837D-2D5867F7CBF2}"/>
+                <a16:creationId xmlns:a16="http://schemas.microsoft.com/office/drawing/2014/main" id="{5BC5ABCF-AD54-454C-8E4C-235473C02DC2}"/>
               </a:ext>
             </a:extLst>
           </p:cNvPr>
@@ -3821,7 +3821,7 @@
           <p:cNvPr id="12" name="">
             <a:extLst xmlns:a="http://schemas.openxmlformats.org/drawingml/2006/main">
               <a:ext uri="{FF2B5EF4-FFF2-40B4-BE49-F238E27FC236}">
-                <a16:creationId xmlns:a16="http://schemas.microsoft.com/office/drawing/2014/main" id="{31E2EEDA-CE24-4CC9-A8FA-EC45D51B8BE2}"/>
+                <a16:creationId xmlns:a16="http://schemas.microsoft.com/office/drawing/2014/main" id="{FBFB3D15-2B53-469D-949A-BBE184293179}"/>
               </a:ext>
             </a:extLst>
           </p:cNvPr>
@@ -3878,7 +3878,7 @@
           <p:cNvPr id="13" name="">
             <a:extLst xmlns:a="http://schemas.openxmlformats.org/drawingml/2006/main">
               <a:ext uri="{FF2B5EF4-FFF2-40B4-BE49-F238E27FC236}">
-                <a16:creationId xmlns:a16="http://schemas.microsoft.com/office/drawing/2014/main" id="{29B730FE-B570-4BFE-AD56-C5E99E631511}"/>
+                <a16:creationId xmlns:a16="http://schemas.microsoft.com/office/drawing/2014/main" id="{4522D0E5-AA4A-4659-8029-B4A5F58ED23D}"/>
               </a:ext>
             </a:extLst>
           </p:cNvPr>
@@ -3935,7 +3935,7 @@
           <p:cNvPr id="14" name="">
             <a:extLst xmlns:a="http://schemas.openxmlformats.org/drawingml/2006/main">
               <a:ext uri="{FF2B5EF4-FFF2-40B4-BE49-F238E27FC236}">
-                <a16:creationId xmlns:a16="http://schemas.microsoft.com/office/drawing/2014/main" id="{73B9C359-AA74-4BC7-83A8-59DBB2FBE095}"/>
+                <a16:creationId xmlns:a16="http://schemas.microsoft.com/office/drawing/2014/main" id="{AA96CDF2-71D7-4519-942F-A60C604E5906}"/>
               </a:ext>
             </a:extLst>
           </p:cNvPr>
@@ -3992,7 +3992,7 @@
           <p:cNvPr id="15" name="">
             <a:extLst xmlns:a="http://schemas.openxmlformats.org/drawingml/2006/main">
               <a:ext uri="{FF2B5EF4-FFF2-40B4-BE49-F238E27FC236}">
-                <a16:creationId xmlns:a16="http://schemas.microsoft.com/office/drawing/2014/main" id="{EE65A999-AE44-4B91-83EF-A324E48A4F84}"/>
+                <a16:creationId xmlns:a16="http://schemas.microsoft.com/office/drawing/2014/main" id="{0D67F06D-BB6F-4274-AD6E-B1651DC86A17}"/>
               </a:ext>
             </a:extLst>
           </p:cNvPr>
@@ -4026,7 +4026,7 @@
           <p:cNvPr id="16" name="">
             <a:extLst xmlns:a="http://schemas.openxmlformats.org/drawingml/2006/main">
               <a:ext uri="{FF2B5EF4-FFF2-40B4-BE49-F238E27FC236}">
-                <a16:creationId xmlns:a16="http://schemas.microsoft.com/office/drawing/2014/main" id="{4904D338-C46D-493A-872C-DC0B59E229CE}"/>
+                <a16:creationId xmlns:a16="http://schemas.microsoft.com/office/drawing/2014/main" id="{0034C809-A5CA-4308-A670-68EB5AAB970C}"/>
               </a:ext>
             </a:extLst>
           </p:cNvPr>
@@ -4083,7 +4083,7 @@
           <p:cNvPr id="17" name="">
             <a:extLst xmlns:a="http://schemas.openxmlformats.org/drawingml/2006/main">
               <a:ext uri="{FF2B5EF4-FFF2-40B4-BE49-F238E27FC236}">
-                <a16:creationId xmlns:a16="http://schemas.microsoft.com/office/drawing/2014/main" id="{50F555C5-E830-4841-B527-EDF0CF31EBE1}"/>
+                <a16:creationId xmlns:a16="http://schemas.microsoft.com/office/drawing/2014/main" id="{6807A1C2-2384-4949-8D2B-41625FCA9A31}"/>
               </a:ext>
             </a:extLst>
           </p:cNvPr>
@@ -4140,7 +4140,7 @@
           <p:cNvPr id="18" name="">
             <a:extLst xmlns:a="http://schemas.openxmlformats.org/drawingml/2006/main">
               <a:ext uri="{FF2B5EF4-FFF2-40B4-BE49-F238E27FC236}">
-                <a16:creationId xmlns:a16="http://schemas.microsoft.com/office/drawing/2014/main" id="{DF49DB6F-A173-40A5-A91E-C2812CC2C600}"/>
+                <a16:creationId xmlns:a16="http://schemas.microsoft.com/office/drawing/2014/main" id="{E643C53D-6300-40B9-8D9C-22FC6EBC0CD5}"/>
               </a:ext>
             </a:extLst>
           </p:cNvPr>
@@ -4195,7 +4195,7 @@
     </p:spTree>
     <p:extLst>
       <p:ext uri="{BB962C8B-B14F-4D97-AF65-F5344CB8AC3E}">
-        <p14:creationId xmlns:p14="http://schemas.microsoft.com/office/powerpoint/2010/main" val="427384676"/>
+        <p14:creationId xmlns:p14="http://schemas.microsoft.com/office/powerpoint/2010/main" val="2094161222"/>
       </p:ext>
     </p:extLst>
   </p:cSld>
@@ -4350,7 +4350,7 @@
           <p:cNvPr id="23" name="">
             <a:extLst xmlns:a="http://schemas.openxmlformats.org/drawingml/2006/main">
               <a:ext uri="{FF2B5EF4-FFF2-40B4-BE49-F238E27FC236}">
-                <a16:creationId xmlns:a16="http://schemas.microsoft.com/office/drawing/2014/main" id="{0FBCF285-A1D7-40A9-ADCF-F2985DDA3AD0}"/>
+                <a16:creationId xmlns:a16="http://schemas.microsoft.com/office/drawing/2014/main" id="{42BF2ADD-1B30-421F-A3C8-8074D828BB4C}"/>
               </a:ext>
             </a:extLst>
           </p:cNvPr>
@@ -4382,7 +4382,7 @@
           <p:cNvPr id="2" name="">
             <a:extLst xmlns:a="http://schemas.openxmlformats.org/drawingml/2006/main">
               <a:ext uri="{FF2B5EF4-FFF2-40B4-BE49-F238E27FC236}">
-                <a16:creationId xmlns:a16="http://schemas.microsoft.com/office/drawing/2014/main" id="{E2E34A46-534A-49A6-9D2E-BEE0FC3D37C8}"/>
+                <a16:creationId xmlns:a16="http://schemas.microsoft.com/office/drawing/2014/main" id="{1A8B1486-F739-41E6-B28D-40000B0D8788}"/>
               </a:ext>
             </a:extLst>
           </p:cNvPr>
@@ -4439,7 +4439,7 @@
           <p:cNvPr id="3" name="">
             <a:extLst xmlns:a="http://schemas.openxmlformats.org/drawingml/2006/main">
               <a:ext uri="{FF2B5EF4-FFF2-40B4-BE49-F238E27FC236}">
-                <a16:creationId xmlns:a16="http://schemas.microsoft.com/office/drawing/2014/main" id="{00F9A9D6-6DA5-465B-A42B-B57E30231B01}"/>
+                <a16:creationId xmlns:a16="http://schemas.microsoft.com/office/drawing/2014/main" id="{9099BD62-3DF5-4BDE-85D0-84F19107B961}"/>
               </a:ext>
             </a:extLst>
           </p:cNvPr>
@@ -4471,7 +4471,7 @@
           <p:cNvPr id="4" name="">
             <a:extLst xmlns:a="http://schemas.openxmlformats.org/drawingml/2006/main">
               <a:ext uri="{FF2B5EF4-FFF2-40B4-BE49-F238E27FC236}">
-                <a16:creationId xmlns:a16="http://schemas.microsoft.com/office/drawing/2014/main" id="{F17E664E-DE95-4B9F-ABEA-3205797F6C33}"/>
+                <a16:creationId xmlns:a16="http://schemas.microsoft.com/office/drawing/2014/main" id="{4B2D2B2A-80CF-4D5A-81F0-2F064E98E5D4}"/>
               </a:ext>
             </a:extLst>
           </p:cNvPr>
@@ -4528,7 +4528,7 @@
           <p:cNvPr id="5" name="">
             <a:extLst xmlns:a="http://schemas.openxmlformats.org/drawingml/2006/main">
               <a:ext uri="{FF2B5EF4-FFF2-40B4-BE49-F238E27FC236}">
-                <a16:creationId xmlns:a16="http://schemas.microsoft.com/office/drawing/2014/main" id="{D8301ACB-C3D8-431D-8065-06E6944776DE}"/>
+                <a16:creationId xmlns:a16="http://schemas.microsoft.com/office/drawing/2014/main" id="{151A8520-8230-4C2C-9272-AF015CC1AE15}"/>
               </a:ext>
             </a:extLst>
           </p:cNvPr>
@@ -4585,7 +4585,7 @@
           <p:cNvPr id="6" name="">
             <a:extLst xmlns:a="http://schemas.openxmlformats.org/drawingml/2006/main">
               <a:ext uri="{FF2B5EF4-FFF2-40B4-BE49-F238E27FC236}">
-                <a16:creationId xmlns:a16="http://schemas.microsoft.com/office/drawing/2014/main" id="{3428D9EC-C375-4578-946D-73340501426B}"/>
+                <a16:creationId xmlns:a16="http://schemas.microsoft.com/office/drawing/2014/main" id="{4F5F89D3-64C2-4BD8-B636-83B8B1683505}"/>
               </a:ext>
             </a:extLst>
           </p:cNvPr>
@@ -4642,7 +4642,7 @@
           <p:cNvPr id="7" name="">
             <a:extLst xmlns:a="http://schemas.openxmlformats.org/drawingml/2006/main">
               <a:ext uri="{FF2B5EF4-FFF2-40B4-BE49-F238E27FC236}">
-                <a16:creationId xmlns:a16="http://schemas.microsoft.com/office/drawing/2014/main" id="{58B917A7-42B4-49F7-A34D-921149144165}"/>
+                <a16:creationId xmlns:a16="http://schemas.microsoft.com/office/drawing/2014/main" id="{E55A43D5-3606-4618-AA04-28DD988C833F}"/>
               </a:ext>
             </a:extLst>
           </p:cNvPr>
@@ -4674,7 +4674,7 @@
           <p:cNvPr id="8" name="">
             <a:extLst xmlns:a="http://schemas.openxmlformats.org/drawingml/2006/main">
               <a:ext uri="{FF2B5EF4-FFF2-40B4-BE49-F238E27FC236}">
-                <a16:creationId xmlns:a16="http://schemas.microsoft.com/office/drawing/2014/main" id="{0BE7B155-D746-4C46-B314-C8FA3E758B04}"/>
+                <a16:creationId xmlns:a16="http://schemas.microsoft.com/office/drawing/2014/main" id="{5CBA9562-EBF0-4593-8818-D23674F5DA54}"/>
               </a:ext>
             </a:extLst>
           </p:cNvPr>
@@ -4731,7 +4731,7 @@
           <p:cNvPr id="9" name="">
             <a:extLst xmlns:a="http://schemas.openxmlformats.org/drawingml/2006/main">
               <a:ext uri="{FF2B5EF4-FFF2-40B4-BE49-F238E27FC236}">
-                <a16:creationId xmlns:a16="http://schemas.microsoft.com/office/drawing/2014/main" id="{0C2064ED-B13F-410A-A8A1-964C846AECD5}"/>
+                <a16:creationId xmlns:a16="http://schemas.microsoft.com/office/drawing/2014/main" id="{695ED2DF-2D87-4B34-8E0B-41A18870EDFC}"/>
               </a:ext>
             </a:extLst>
           </p:cNvPr>
@@ -4788,7 +4788,7 @@
           <p:cNvPr id="10" name="">
             <a:extLst xmlns:a="http://schemas.openxmlformats.org/drawingml/2006/main">
               <a:ext uri="{FF2B5EF4-FFF2-40B4-BE49-F238E27FC236}">
-                <a16:creationId xmlns:a16="http://schemas.microsoft.com/office/drawing/2014/main" id="{58F75921-827D-4EA6-AA6D-1E3A33638494}"/>
+                <a16:creationId xmlns:a16="http://schemas.microsoft.com/office/drawing/2014/main" id="{A190A3BD-493C-4754-9AF2-9269D7EB89E7}"/>
               </a:ext>
             </a:extLst>
           </p:cNvPr>
@@ -4822,7 +4822,7 @@
           <p:cNvPr id="11" name="">
             <a:extLst xmlns:a="http://schemas.openxmlformats.org/drawingml/2006/main">
               <a:ext uri="{FF2B5EF4-FFF2-40B4-BE49-F238E27FC236}">
-                <a16:creationId xmlns:a16="http://schemas.microsoft.com/office/drawing/2014/main" id="{D0BE050C-83E5-4C09-9257-44DFA22F0A8C}"/>
+                <a16:creationId xmlns:a16="http://schemas.microsoft.com/office/drawing/2014/main" id="{B0D05BD7-7A90-4051-8E4C-C3ED798B3D03}"/>
               </a:ext>
             </a:extLst>
           </p:cNvPr>
@@ -4854,7 +4854,7 @@
           <p:cNvPr id="12" name="">
             <a:extLst xmlns:a="http://schemas.openxmlformats.org/drawingml/2006/main">
               <a:ext uri="{FF2B5EF4-FFF2-40B4-BE49-F238E27FC236}">
-                <a16:creationId xmlns:a16="http://schemas.microsoft.com/office/drawing/2014/main" id="{ED178B57-DF12-4703-8968-B3636FE070CD}"/>
+                <a16:creationId xmlns:a16="http://schemas.microsoft.com/office/drawing/2014/main" id="{A55CDB23-1E56-451A-BE83-6FDB9D045879}"/>
               </a:ext>
             </a:extLst>
           </p:cNvPr>
@@ -4911,7 +4911,7 @@
           <p:cNvPr id="13" name="">
             <a:extLst xmlns:a="http://schemas.openxmlformats.org/drawingml/2006/main">
               <a:ext uri="{FF2B5EF4-FFF2-40B4-BE49-F238E27FC236}">
-                <a16:creationId xmlns:a16="http://schemas.microsoft.com/office/drawing/2014/main" id="{16061F86-5B6F-4657-A14B-5170E67D7AB9}"/>
+                <a16:creationId xmlns:a16="http://schemas.microsoft.com/office/drawing/2014/main" id="{7EFEA0BE-0877-4644-A375-B799EDAEA8C9}"/>
               </a:ext>
             </a:extLst>
           </p:cNvPr>
@@ -4968,7 +4968,7 @@
           <p:cNvPr id="14" name="">
             <a:extLst xmlns:a="http://schemas.openxmlformats.org/drawingml/2006/main">
               <a:ext uri="{FF2B5EF4-FFF2-40B4-BE49-F238E27FC236}">
-                <a16:creationId xmlns:a16="http://schemas.microsoft.com/office/drawing/2014/main" id="{9174C53B-312B-4090-9A7F-F275A6A3F3BF}"/>
+                <a16:creationId xmlns:a16="http://schemas.microsoft.com/office/drawing/2014/main" id="{31A1DB83-029A-410A-A21F-335BD281AAB8}"/>
               </a:ext>
             </a:extLst>
           </p:cNvPr>
@@ -5002,7 +5002,7 @@
           <p:cNvPr id="15" name="">
             <a:extLst xmlns:a="http://schemas.openxmlformats.org/drawingml/2006/main">
               <a:ext uri="{FF2B5EF4-FFF2-40B4-BE49-F238E27FC236}">
-                <a16:creationId xmlns:a16="http://schemas.microsoft.com/office/drawing/2014/main" id="{165C2904-2469-4BCC-9A2F-331A32FC9607}"/>
+                <a16:creationId xmlns:a16="http://schemas.microsoft.com/office/drawing/2014/main" id="{F90D8040-1080-4EE2-A2FB-AF3987B4C450}"/>
               </a:ext>
             </a:extLst>
           </p:cNvPr>
@@ -5034,7 +5034,7 @@
           <p:cNvPr id="16" name="">
             <a:extLst xmlns:a="http://schemas.openxmlformats.org/drawingml/2006/main">
               <a:ext uri="{FF2B5EF4-FFF2-40B4-BE49-F238E27FC236}">
-                <a16:creationId xmlns:a16="http://schemas.microsoft.com/office/drawing/2014/main" id="{835A817C-E3DB-40A1-B1E5-22D92837AE17}"/>
+                <a16:creationId xmlns:a16="http://schemas.microsoft.com/office/drawing/2014/main" id="{8E0D3BEC-9CC8-463B-B24C-97B44EFB9BAD}"/>
               </a:ext>
             </a:extLst>
           </p:cNvPr>
@@ -5091,7 +5091,7 @@
           <p:cNvPr id="17" name="">
             <a:extLst xmlns:a="http://schemas.openxmlformats.org/drawingml/2006/main">
               <a:ext uri="{FF2B5EF4-FFF2-40B4-BE49-F238E27FC236}">
-                <a16:creationId xmlns:a16="http://schemas.microsoft.com/office/drawing/2014/main" id="{5EB3F0C1-4E11-4E28-90FB-30DDB2B3792B}"/>
+                <a16:creationId xmlns:a16="http://schemas.microsoft.com/office/drawing/2014/main" id="{01AB4448-C28B-4A6F-B83F-EF9ACB8EB896}"/>
               </a:ext>
             </a:extLst>
           </p:cNvPr>
@@ -5148,7 +5148,7 @@
           <p:cNvPr id="18" name="">
             <a:extLst xmlns:a="http://schemas.openxmlformats.org/drawingml/2006/main">
               <a:ext uri="{FF2B5EF4-FFF2-40B4-BE49-F238E27FC236}">
-                <a16:creationId xmlns:a16="http://schemas.microsoft.com/office/drawing/2014/main" id="{4BF3464D-ECB6-4CFF-9F37-9F936F584B03}"/>
+                <a16:creationId xmlns:a16="http://schemas.microsoft.com/office/drawing/2014/main" id="{AD76A073-0898-4CDC-939D-E970D86FDAF7}"/>
               </a:ext>
             </a:extLst>
           </p:cNvPr>
@@ -5182,7 +5182,7 @@
           <p:cNvPr id="19" name="">
             <a:extLst xmlns:a="http://schemas.openxmlformats.org/drawingml/2006/main">
               <a:ext uri="{FF2B5EF4-FFF2-40B4-BE49-F238E27FC236}">
-                <a16:creationId xmlns:a16="http://schemas.microsoft.com/office/drawing/2014/main" id="{3561247F-4201-4D7D-B5B0-BB6DEF1A2C1F}"/>
+                <a16:creationId xmlns:a16="http://schemas.microsoft.com/office/drawing/2014/main" id="{03DE28FC-93DE-4B9C-A0DE-BE7E8A422D44}"/>
               </a:ext>
             </a:extLst>
           </p:cNvPr>
@@ -5214,7 +5214,7 @@
           <p:cNvPr id="20" name="">
             <a:extLst xmlns:a="http://schemas.openxmlformats.org/drawingml/2006/main">
               <a:ext uri="{FF2B5EF4-FFF2-40B4-BE49-F238E27FC236}">
-                <a16:creationId xmlns:a16="http://schemas.microsoft.com/office/drawing/2014/main" id="{84A85BD6-763F-4C27-A639-6014032251A9}"/>
+                <a16:creationId xmlns:a16="http://schemas.microsoft.com/office/drawing/2014/main" id="{D33344F9-FDD8-4FBB-994F-50A66333C000}"/>
               </a:ext>
             </a:extLst>
           </p:cNvPr>
@@ -5271,7 +5271,7 @@
           <p:cNvPr id="21" name="">
             <a:extLst xmlns:a="http://schemas.openxmlformats.org/drawingml/2006/main">
               <a:ext uri="{FF2B5EF4-FFF2-40B4-BE49-F238E27FC236}">
-                <a16:creationId xmlns:a16="http://schemas.microsoft.com/office/drawing/2014/main" id="{7847C996-D3C9-49DC-BA7F-0BED0404602D}"/>
+                <a16:creationId xmlns:a16="http://schemas.microsoft.com/office/drawing/2014/main" id="{9DCC6527-9700-40BC-8FD2-EEB707699BBA}"/>
               </a:ext>
             </a:extLst>
           </p:cNvPr>
@@ -5328,7 +5328,7 @@
           <p:cNvPr id="22" name="">
             <a:extLst xmlns:a="http://schemas.openxmlformats.org/drawingml/2006/main">
               <a:ext uri="{FF2B5EF4-FFF2-40B4-BE49-F238E27FC236}">
-                <a16:creationId xmlns:a16="http://schemas.microsoft.com/office/drawing/2014/main" id="{100E1448-6198-4882-B278-98A4924D092F}"/>
+                <a16:creationId xmlns:a16="http://schemas.microsoft.com/office/drawing/2014/main" id="{7C3F483A-EFAF-4360-A5F4-48354143FEBE}"/>
               </a:ext>
             </a:extLst>
           </p:cNvPr>
@@ -5383,7 +5383,7 @@
     </p:spTree>
     <p:extLst>
       <p:ext uri="{BB962C8B-B14F-4D97-AF65-F5344CB8AC3E}">
-        <p14:creationId xmlns:p14="http://schemas.microsoft.com/office/powerpoint/2010/main" val="193889459"/>
+        <p14:creationId xmlns:p14="http://schemas.microsoft.com/office/powerpoint/2010/main" val="1473071568"/>
       </p:ext>
     </p:extLst>
   </p:cSld>
@@ -5584,7 +5584,7 @@
           <p:cNvPr id="23" name="">
             <a:extLst xmlns:a="http://schemas.openxmlformats.org/drawingml/2006/main">
               <a:ext uri="{FF2B5EF4-FFF2-40B4-BE49-F238E27FC236}">
-                <a16:creationId xmlns:a16="http://schemas.microsoft.com/office/drawing/2014/main" id="{7FA5DCA4-176A-446E-BF0A-C1674E6DD45E}"/>
+                <a16:creationId xmlns:a16="http://schemas.microsoft.com/office/drawing/2014/main" id="{4B699F58-2ECA-4E7C-AE2E-0E97D783CA19}"/>
               </a:ext>
             </a:extLst>
           </p:cNvPr>
@@ -5616,7 +5616,7 @@
           <p:cNvPr id="2" name="">
             <a:extLst xmlns:a="http://schemas.openxmlformats.org/drawingml/2006/main">
               <a:ext uri="{FF2B5EF4-FFF2-40B4-BE49-F238E27FC236}">
-                <a16:creationId xmlns:a16="http://schemas.microsoft.com/office/drawing/2014/main" id="{DF43BFDF-486F-4671-88B1-7E52CAB2D1E5}"/>
+                <a16:creationId xmlns:a16="http://schemas.microsoft.com/office/drawing/2014/main" id="{B5C1CDCD-8E6E-4BAB-9E1A-CB64508955D6}"/>
               </a:ext>
             </a:extLst>
           </p:cNvPr>
@@ -5673,7 +5673,7 @@
           <p:cNvPr id="3" name="">
             <a:extLst xmlns:a="http://schemas.openxmlformats.org/drawingml/2006/main">
               <a:ext uri="{FF2B5EF4-FFF2-40B4-BE49-F238E27FC236}">
-                <a16:creationId xmlns:a16="http://schemas.microsoft.com/office/drawing/2014/main" id="{F5A7B83A-C0D4-4DC1-97B2-EF2C2BA0F884}"/>
+                <a16:creationId xmlns:a16="http://schemas.microsoft.com/office/drawing/2014/main" id="{BAE49D70-F11B-4394-8246-6547100368AC}"/>
               </a:ext>
             </a:extLst>
           </p:cNvPr>
@@ -5705,7 +5705,7 @@
           <p:cNvPr id="4" name="">
             <a:extLst xmlns:a="http://schemas.openxmlformats.org/drawingml/2006/main">
               <a:ext uri="{FF2B5EF4-FFF2-40B4-BE49-F238E27FC236}">
-                <a16:creationId xmlns:a16="http://schemas.microsoft.com/office/drawing/2014/main" id="{C27C4317-AF5D-4721-8751-7A3F1D3197FF}"/>
+                <a16:creationId xmlns:a16="http://schemas.microsoft.com/office/drawing/2014/main" id="{21E2E99F-7BE0-40B4-B382-4F0B53567017}"/>
               </a:ext>
             </a:extLst>
           </p:cNvPr>
@@ -5762,7 +5762,7 @@
           <p:cNvPr id="5" name="">
             <a:extLst xmlns:a="http://schemas.openxmlformats.org/drawingml/2006/main">
               <a:ext uri="{FF2B5EF4-FFF2-40B4-BE49-F238E27FC236}">
-                <a16:creationId xmlns:a16="http://schemas.microsoft.com/office/drawing/2014/main" id="{C0FE2567-0780-4BDE-A56E-CADD2646666A}"/>
+                <a16:creationId xmlns:a16="http://schemas.microsoft.com/office/drawing/2014/main" id="{C2DF2A3F-8C9F-49CE-A8DA-D8781BDBF7AA}"/>
               </a:ext>
             </a:extLst>
           </p:cNvPr>
@@ -5819,7 +5819,7 @@
           <p:cNvPr id="6" name="">
             <a:extLst xmlns:a="http://schemas.openxmlformats.org/drawingml/2006/main">
               <a:ext uri="{FF2B5EF4-FFF2-40B4-BE49-F238E27FC236}">
-                <a16:creationId xmlns:a16="http://schemas.microsoft.com/office/drawing/2014/main" id="{14CFF34E-2E30-44D6-9391-A9ECE7E4DDC1}"/>
+                <a16:creationId xmlns:a16="http://schemas.microsoft.com/office/drawing/2014/main" id="{F8386D03-A156-43FA-BBCE-1511486C8ED7}"/>
               </a:ext>
             </a:extLst>
           </p:cNvPr>
@@ -5876,7 +5876,7 @@
           <p:cNvPr id="7" name="">
             <a:extLst xmlns:a="http://schemas.openxmlformats.org/drawingml/2006/main">
               <a:ext uri="{FF2B5EF4-FFF2-40B4-BE49-F238E27FC236}">
-                <a16:creationId xmlns:a16="http://schemas.microsoft.com/office/drawing/2014/main" id="{149AE00F-2150-411E-A9ED-6B16B1C2E323}"/>
+                <a16:creationId xmlns:a16="http://schemas.microsoft.com/office/drawing/2014/main" id="{B5082447-AA71-4F7D-AB4C-A4627DCE64BD}"/>
               </a:ext>
             </a:extLst>
           </p:cNvPr>
@@ -5908,7 +5908,7 @@
           <p:cNvPr id="8" name="">
             <a:extLst xmlns:a="http://schemas.openxmlformats.org/drawingml/2006/main">
               <a:ext uri="{FF2B5EF4-FFF2-40B4-BE49-F238E27FC236}">
-                <a16:creationId xmlns:a16="http://schemas.microsoft.com/office/drawing/2014/main" id="{05D12D17-D811-40CD-82C5-B7A5D0ECDE2D}"/>
+                <a16:creationId xmlns:a16="http://schemas.microsoft.com/office/drawing/2014/main" id="{5FA845B1-BD29-456B-83FB-1E2BA4D1B24F}"/>
               </a:ext>
             </a:extLst>
           </p:cNvPr>
@@ -5965,7 +5965,7 @@
           <p:cNvPr id="9" name="">
             <a:extLst xmlns:a="http://schemas.openxmlformats.org/drawingml/2006/main">
               <a:ext uri="{FF2B5EF4-FFF2-40B4-BE49-F238E27FC236}">
-                <a16:creationId xmlns:a16="http://schemas.microsoft.com/office/drawing/2014/main" id="{889B1274-6F78-4C43-B55E-BCF5DA62BB5B}"/>
+                <a16:creationId xmlns:a16="http://schemas.microsoft.com/office/drawing/2014/main" id="{23477497-8E24-49F1-A487-DCCAAF2EBEB9}"/>
               </a:ext>
             </a:extLst>
           </p:cNvPr>
@@ -6022,7 +6022,7 @@
           <p:cNvPr id="10" name="">
             <a:extLst xmlns:a="http://schemas.openxmlformats.org/drawingml/2006/main">
               <a:ext uri="{FF2B5EF4-FFF2-40B4-BE49-F238E27FC236}">
-                <a16:creationId xmlns:a16="http://schemas.microsoft.com/office/drawing/2014/main" id="{C83A97C4-5AB7-43E3-9794-77480F693F51}"/>
+                <a16:creationId xmlns:a16="http://schemas.microsoft.com/office/drawing/2014/main" id="{46F8B170-0EFB-4C82-A4A6-92A5627A60F7}"/>
               </a:ext>
             </a:extLst>
           </p:cNvPr>
@@ -6056,7 +6056,7 @@
           <p:cNvPr id="11" name="">
             <a:extLst xmlns:a="http://schemas.openxmlformats.org/drawingml/2006/main">
               <a:ext uri="{FF2B5EF4-FFF2-40B4-BE49-F238E27FC236}">
-                <a16:creationId xmlns:a16="http://schemas.microsoft.com/office/drawing/2014/main" id="{55EA43E3-7A92-4F92-B4C7-31992C572B3E}"/>
+                <a16:creationId xmlns:a16="http://schemas.microsoft.com/office/drawing/2014/main" id="{33C5C0AB-3DFE-4EF6-8E42-F7099776A42A}"/>
               </a:ext>
             </a:extLst>
           </p:cNvPr>
@@ -6088,7 +6088,7 @@
           <p:cNvPr id="12" name="">
             <a:extLst xmlns:a="http://schemas.openxmlformats.org/drawingml/2006/main">
               <a:ext uri="{FF2B5EF4-FFF2-40B4-BE49-F238E27FC236}">
-                <a16:creationId xmlns:a16="http://schemas.microsoft.com/office/drawing/2014/main" id="{64434BAF-8553-410F-9186-2948B226FA0A}"/>
+                <a16:creationId xmlns:a16="http://schemas.microsoft.com/office/drawing/2014/main" id="{EEBC82DE-0D0C-452D-88FB-D1EC4EE7CDAE}"/>
               </a:ext>
             </a:extLst>
           </p:cNvPr>
@@ -6145,7 +6145,7 @@
           <p:cNvPr id="13" name="">
             <a:extLst xmlns:a="http://schemas.openxmlformats.org/drawingml/2006/main">
               <a:ext uri="{FF2B5EF4-FFF2-40B4-BE49-F238E27FC236}">
-                <a16:creationId xmlns:a16="http://schemas.microsoft.com/office/drawing/2014/main" id="{F4937828-A9CD-49AD-BC6B-EB6AFCEB7703}"/>
+                <a16:creationId xmlns:a16="http://schemas.microsoft.com/office/drawing/2014/main" id="{00CA5B90-B55F-4716-A8F5-556BA6B31B9B}"/>
               </a:ext>
             </a:extLst>
           </p:cNvPr>
@@ -6202,7 +6202,7 @@
           <p:cNvPr id="14" name="">
             <a:extLst xmlns:a="http://schemas.openxmlformats.org/drawingml/2006/main">
               <a:ext uri="{FF2B5EF4-FFF2-40B4-BE49-F238E27FC236}">
-                <a16:creationId xmlns:a16="http://schemas.microsoft.com/office/drawing/2014/main" id="{E8230F94-219D-48B7-B938-90CEA6DCBDF5}"/>
+                <a16:creationId xmlns:a16="http://schemas.microsoft.com/office/drawing/2014/main" id="{5D712836-E45A-4151-9380-F64A55C8E15F}"/>
               </a:ext>
             </a:extLst>
           </p:cNvPr>
@@ -6236,7 +6236,7 @@
           <p:cNvPr id="15" name="">
             <a:extLst xmlns:a="http://schemas.openxmlformats.org/drawingml/2006/main">
               <a:ext uri="{FF2B5EF4-FFF2-40B4-BE49-F238E27FC236}">
-                <a16:creationId xmlns:a16="http://schemas.microsoft.com/office/drawing/2014/main" id="{655C9FDC-F24F-4102-B7EC-80E3A520D3F1}"/>
+                <a16:creationId xmlns:a16="http://schemas.microsoft.com/office/drawing/2014/main" id="{BDC2DAAB-DF41-48E0-B165-9A39EDA0E2DF}"/>
               </a:ext>
             </a:extLst>
           </p:cNvPr>
@@ -6268,7 +6268,7 @@
           <p:cNvPr id="16" name="">
             <a:extLst xmlns:a="http://schemas.openxmlformats.org/drawingml/2006/main">
               <a:ext uri="{FF2B5EF4-FFF2-40B4-BE49-F238E27FC236}">
-                <a16:creationId xmlns:a16="http://schemas.microsoft.com/office/drawing/2014/main" id="{003D312F-ADD5-44DA-9BE6-443066B969CF}"/>
+                <a16:creationId xmlns:a16="http://schemas.microsoft.com/office/drawing/2014/main" id="{891B0F63-F9A9-4471-8D33-69AD72A5E438}"/>
               </a:ext>
             </a:extLst>
           </p:cNvPr>
@@ -6325,7 +6325,7 @@
           <p:cNvPr id="17" name="">
             <a:extLst xmlns:a="http://schemas.openxmlformats.org/drawingml/2006/main">
               <a:ext uri="{FF2B5EF4-FFF2-40B4-BE49-F238E27FC236}">
-                <a16:creationId xmlns:a16="http://schemas.microsoft.com/office/drawing/2014/main" id="{62B75A51-DCE0-4567-9582-464734A8A077}"/>
+                <a16:creationId xmlns:a16="http://schemas.microsoft.com/office/drawing/2014/main" id="{491BF267-57D5-4A55-A5A8-0B024A05E472}"/>
               </a:ext>
             </a:extLst>
           </p:cNvPr>
@@ -6382,7 +6382,7 @@
           <p:cNvPr id="18" name="">
             <a:extLst xmlns:a="http://schemas.openxmlformats.org/drawingml/2006/main">
               <a:ext uri="{FF2B5EF4-FFF2-40B4-BE49-F238E27FC236}">
-                <a16:creationId xmlns:a16="http://schemas.microsoft.com/office/drawing/2014/main" id="{81CC5FFF-85CB-4B38-BC45-A114C3B155DA}"/>
+                <a16:creationId xmlns:a16="http://schemas.microsoft.com/office/drawing/2014/main" id="{E7F2BDFC-04FB-42DB-B35D-9BE554482686}"/>
               </a:ext>
             </a:extLst>
           </p:cNvPr>
@@ -6416,7 +6416,7 @@
           <p:cNvPr id="19" name="">
             <a:extLst xmlns:a="http://schemas.openxmlformats.org/drawingml/2006/main">
               <a:ext uri="{FF2B5EF4-FFF2-40B4-BE49-F238E27FC236}">
-                <a16:creationId xmlns:a16="http://schemas.microsoft.com/office/drawing/2014/main" id="{0214823B-20E3-430C-9553-19F7F1EE95F1}"/>
+                <a16:creationId xmlns:a16="http://schemas.microsoft.com/office/drawing/2014/main" id="{C61C744A-B3BD-4784-AFEF-6AF55ADD4A83}"/>
               </a:ext>
             </a:extLst>
           </p:cNvPr>
@@ -6448,7 +6448,7 @@
           <p:cNvPr id="20" name="">
             <a:extLst xmlns:a="http://schemas.openxmlformats.org/drawingml/2006/main">
               <a:ext uri="{FF2B5EF4-FFF2-40B4-BE49-F238E27FC236}">
-                <a16:creationId xmlns:a16="http://schemas.microsoft.com/office/drawing/2014/main" id="{3C5B00D5-5E12-4026-B0AB-FB8EBBA75174}"/>
+                <a16:creationId xmlns:a16="http://schemas.microsoft.com/office/drawing/2014/main" id="{0560651E-FC25-4E78-9827-C33810741F85}"/>
               </a:ext>
             </a:extLst>
           </p:cNvPr>
@@ -6505,7 +6505,7 @@
           <p:cNvPr id="21" name="">
             <a:extLst xmlns:a="http://schemas.openxmlformats.org/drawingml/2006/main">
               <a:ext uri="{FF2B5EF4-FFF2-40B4-BE49-F238E27FC236}">
-                <a16:creationId xmlns:a16="http://schemas.microsoft.com/office/drawing/2014/main" id="{E46CBB82-95F2-4C46-B961-3A93107C3D77}"/>
+                <a16:creationId xmlns:a16="http://schemas.microsoft.com/office/drawing/2014/main" id="{615B9D9D-A047-4078-9C0C-9A0F3FE09F04}"/>
               </a:ext>
             </a:extLst>
           </p:cNvPr>
@@ -6562,7 +6562,7 @@
           <p:cNvPr id="22" name="">
             <a:extLst xmlns:a="http://schemas.openxmlformats.org/drawingml/2006/main">
               <a:ext uri="{FF2B5EF4-FFF2-40B4-BE49-F238E27FC236}">
-                <a16:creationId xmlns:a16="http://schemas.microsoft.com/office/drawing/2014/main" id="{2BF2133A-1A53-461C-A2A4-717E9404B32F}"/>
+                <a16:creationId xmlns:a16="http://schemas.microsoft.com/office/drawing/2014/main" id="{BFA22B99-F19F-4F8D-B320-3CBEC40D342C}"/>
               </a:ext>
             </a:extLst>
           </p:cNvPr>
@@ -6617,7 +6617,7 @@
     </p:spTree>
     <p:extLst>
       <p:ext uri="{BB962C8B-B14F-4D97-AF65-F5344CB8AC3E}">
-        <p14:creationId xmlns:p14="http://schemas.microsoft.com/office/powerpoint/2010/main" val="1533143352"/>
+        <p14:creationId xmlns:p14="http://schemas.microsoft.com/office/powerpoint/2010/main" val="1110603693"/>
       </p:ext>
     </p:extLst>
   </p:cSld>
@@ -6818,7 +6818,7 @@
           <p:cNvPr id="16" name="">
             <a:extLst xmlns:a="http://schemas.openxmlformats.org/drawingml/2006/main">
               <a:ext uri="{FF2B5EF4-FFF2-40B4-BE49-F238E27FC236}">
-                <a16:creationId xmlns:a16="http://schemas.microsoft.com/office/drawing/2014/main" id="{5237CB94-00FC-419D-B24C-E3DB6E53E29B}"/>
+                <a16:creationId xmlns:a16="http://schemas.microsoft.com/office/drawing/2014/main" id="{44677FC2-9855-46EB-B646-6F7C9D7E50B3}"/>
               </a:ext>
             </a:extLst>
           </p:cNvPr>
@@ -6850,7 +6850,7 @@
           <p:cNvPr id="2" name="">
             <a:extLst xmlns:a="http://schemas.openxmlformats.org/drawingml/2006/main">
               <a:ext uri="{FF2B5EF4-FFF2-40B4-BE49-F238E27FC236}">
-                <a16:creationId xmlns:a16="http://schemas.microsoft.com/office/drawing/2014/main" id="{CC53FE41-6C4B-4832-B4C0-1DC08F059DB2}"/>
+                <a16:creationId xmlns:a16="http://schemas.microsoft.com/office/drawing/2014/main" id="{5380DA4B-A7FA-4A75-BA53-92F858BC8A53}"/>
               </a:ext>
             </a:extLst>
           </p:cNvPr>
@@ -6907,7 +6907,7 @@
           <p:cNvPr id="3" name="">
             <a:extLst xmlns:a="http://schemas.openxmlformats.org/drawingml/2006/main">
               <a:ext uri="{FF2B5EF4-FFF2-40B4-BE49-F238E27FC236}">
-                <a16:creationId xmlns:a16="http://schemas.microsoft.com/office/drawing/2014/main" id="{78114F39-F19A-4EC6-A385-29AC4FA738C8}"/>
+                <a16:creationId xmlns:a16="http://schemas.microsoft.com/office/drawing/2014/main" id="{03CC2A57-7AD1-4AA6-BA50-FF2488C7B4AF}"/>
               </a:ext>
             </a:extLst>
           </p:cNvPr>
@@ -6939,7 +6939,7 @@
           <p:cNvPr id="4" name="">
             <a:extLst xmlns:a="http://schemas.openxmlformats.org/drawingml/2006/main">
               <a:ext uri="{FF2B5EF4-FFF2-40B4-BE49-F238E27FC236}">
-                <a16:creationId xmlns:a16="http://schemas.microsoft.com/office/drawing/2014/main" id="{3499BEA7-C70D-4F1A-924F-164141A1FEAB}"/>
+                <a16:creationId xmlns:a16="http://schemas.microsoft.com/office/drawing/2014/main" id="{B047CD0C-4FC6-40FE-A7FC-268AE62CD51A}"/>
               </a:ext>
             </a:extLst>
           </p:cNvPr>
@@ -6996,7 +6996,7 @@
           <p:cNvPr id="5" name="">
             <a:extLst xmlns:a="http://schemas.openxmlformats.org/drawingml/2006/main">
               <a:ext uri="{FF2B5EF4-FFF2-40B4-BE49-F238E27FC236}">
-                <a16:creationId xmlns:a16="http://schemas.microsoft.com/office/drawing/2014/main" id="{7ED7F496-A222-4E6B-B888-D8D4562C4ACA}"/>
+                <a16:creationId xmlns:a16="http://schemas.microsoft.com/office/drawing/2014/main" id="{7DA49CBC-50B5-4837-95FA-806F3D6F1E0E}"/>
               </a:ext>
             </a:extLst>
           </p:cNvPr>
@@ -7053,7 +7053,7 @@
           <p:cNvPr id="6" name="">
             <a:extLst xmlns:a="http://schemas.openxmlformats.org/drawingml/2006/main">
               <a:ext uri="{FF2B5EF4-FFF2-40B4-BE49-F238E27FC236}">
-                <a16:creationId xmlns:a16="http://schemas.microsoft.com/office/drawing/2014/main" id="{C44D579A-30B7-40F2-B723-D9ADF555E456}"/>
+                <a16:creationId xmlns:a16="http://schemas.microsoft.com/office/drawing/2014/main" id="{85E3412E-0D23-48F5-B507-CC4F487B57FF}"/>
               </a:ext>
             </a:extLst>
           </p:cNvPr>
@@ -7110,7 +7110,7 @@
           <p:cNvPr id="7" name="">
             <a:extLst xmlns:a="http://schemas.openxmlformats.org/drawingml/2006/main">
               <a:ext uri="{FF2B5EF4-FFF2-40B4-BE49-F238E27FC236}">
-                <a16:creationId xmlns:a16="http://schemas.microsoft.com/office/drawing/2014/main" id="{39004F25-EF9F-4D07-8693-962CEA1E3070}"/>
+                <a16:creationId xmlns:a16="http://schemas.microsoft.com/office/drawing/2014/main" id="{134C57E3-10AF-4D7E-BEBC-8FF838CC64D1}"/>
               </a:ext>
             </a:extLst>
           </p:cNvPr>
@@ -7142,7 +7142,7 @@
           <p:cNvPr id="8" name="">
             <a:extLst xmlns:a="http://schemas.openxmlformats.org/drawingml/2006/main">
               <a:ext uri="{FF2B5EF4-FFF2-40B4-BE49-F238E27FC236}">
-                <a16:creationId xmlns:a16="http://schemas.microsoft.com/office/drawing/2014/main" id="{834AAAB9-0950-4B93-B864-3CA125E284FB}"/>
+                <a16:creationId xmlns:a16="http://schemas.microsoft.com/office/drawing/2014/main" id="{7A8C2AE4-F9CA-4C98-AC27-80FAB5A6CC49}"/>
               </a:ext>
             </a:extLst>
           </p:cNvPr>
@@ -7199,7 +7199,7 @@
           <p:cNvPr id="9" name="">
             <a:extLst xmlns:a="http://schemas.openxmlformats.org/drawingml/2006/main">
               <a:ext uri="{FF2B5EF4-FFF2-40B4-BE49-F238E27FC236}">
-                <a16:creationId xmlns:a16="http://schemas.microsoft.com/office/drawing/2014/main" id="{1CC7F892-0295-48F8-BED1-54D5EB0ED142}"/>
+                <a16:creationId xmlns:a16="http://schemas.microsoft.com/office/drawing/2014/main" id="{131A4398-2E5A-436E-833E-B78792FE6215}"/>
               </a:ext>
             </a:extLst>
           </p:cNvPr>
@@ -7256,7 +7256,7 @@
           <p:cNvPr id="10" name="">
             <a:extLst xmlns:a="http://schemas.openxmlformats.org/drawingml/2006/main">
               <a:ext uri="{FF2B5EF4-FFF2-40B4-BE49-F238E27FC236}">
-                <a16:creationId xmlns:a16="http://schemas.microsoft.com/office/drawing/2014/main" id="{690AB27B-84C8-43BD-8754-B7BA6F6BB1F3}"/>
+                <a16:creationId xmlns:a16="http://schemas.microsoft.com/office/drawing/2014/main" id="{D5B6E59C-8517-4C91-A452-836E0DBCDDA9}"/>
               </a:ext>
             </a:extLst>
           </p:cNvPr>
@@ -7313,7 +7313,7 @@
           <p:cNvPr id="11" name="">
             <a:extLst xmlns:a="http://schemas.openxmlformats.org/drawingml/2006/main">
               <a:ext uri="{FF2B5EF4-FFF2-40B4-BE49-F238E27FC236}">
-                <a16:creationId xmlns:a16="http://schemas.microsoft.com/office/drawing/2014/main" id="{054865EB-0570-4957-AE5E-0C020AB87285}"/>
+                <a16:creationId xmlns:a16="http://schemas.microsoft.com/office/drawing/2014/main" id="{50E9FFED-1D6F-4B9D-ACD1-2A6F8B22B232}"/>
               </a:ext>
             </a:extLst>
           </p:cNvPr>
@@ -7345,7 +7345,7 @@
           <p:cNvPr id="12" name="">
             <a:extLst xmlns:a="http://schemas.openxmlformats.org/drawingml/2006/main">
               <a:ext uri="{FF2B5EF4-FFF2-40B4-BE49-F238E27FC236}">
-                <a16:creationId xmlns:a16="http://schemas.microsoft.com/office/drawing/2014/main" id="{A2A9C401-97D4-4DB7-A00F-FAAFAA070AFB}"/>
+                <a16:creationId xmlns:a16="http://schemas.microsoft.com/office/drawing/2014/main" id="{A4A5EEFA-1317-4EFC-B3A0-3921C918727C}"/>
               </a:ext>
             </a:extLst>
           </p:cNvPr>
@@ -7402,7 +7402,7 @@
           <p:cNvPr id="13" name="">
             <a:extLst xmlns:a="http://schemas.openxmlformats.org/drawingml/2006/main">
               <a:ext uri="{FF2B5EF4-FFF2-40B4-BE49-F238E27FC236}">
-                <a16:creationId xmlns:a16="http://schemas.microsoft.com/office/drawing/2014/main" id="{D70C5264-A3A7-4DCB-B834-B7CFC8756D11}"/>
+                <a16:creationId xmlns:a16="http://schemas.microsoft.com/office/drawing/2014/main" id="{579732DA-80F5-4E4F-A97C-D579D9F18666}"/>
               </a:ext>
             </a:extLst>
           </p:cNvPr>
@@ -7459,7 +7459,7 @@
           <p:cNvPr id="14" name="">
             <a:extLst xmlns:a="http://schemas.openxmlformats.org/drawingml/2006/main">
               <a:ext uri="{FF2B5EF4-FFF2-40B4-BE49-F238E27FC236}">
-                <a16:creationId xmlns:a16="http://schemas.microsoft.com/office/drawing/2014/main" id="{92DF1404-1F12-46D3-A888-6E1F85BE05C8}"/>
+                <a16:creationId xmlns:a16="http://schemas.microsoft.com/office/drawing/2014/main" id="{C3C152DB-ADA0-4386-9449-ACA72EE55F13}"/>
               </a:ext>
             </a:extLst>
           </p:cNvPr>
@@ -7516,7 +7516,7 @@
           <p:cNvPr id="15" name="">
             <a:extLst xmlns:a="http://schemas.openxmlformats.org/drawingml/2006/main">
               <a:ext uri="{FF2B5EF4-FFF2-40B4-BE49-F238E27FC236}">
-                <a16:creationId xmlns:a16="http://schemas.microsoft.com/office/drawing/2014/main" id="{4AB4D445-4ED3-4261-8603-42A50C0C055E}"/>
+                <a16:creationId xmlns:a16="http://schemas.microsoft.com/office/drawing/2014/main" id="{EBA3C4BC-B163-49BB-9CFE-3E04F7AB1E9D}"/>
               </a:ext>
             </a:extLst>
           </p:cNvPr>
@@ -7571,7 +7571,7 @@
     </p:spTree>
     <p:extLst>
       <p:ext uri="{BB962C8B-B14F-4D97-AF65-F5344CB8AC3E}">
-        <p14:creationId xmlns:p14="http://schemas.microsoft.com/office/powerpoint/2010/main" val="816168121"/>
+        <p14:creationId xmlns:p14="http://schemas.microsoft.com/office/powerpoint/2010/main" val="2120028263"/>
       </p:ext>
     </p:extLst>
   </p:cSld>
@@ -7769,10 +7769,10 @@
       </p:grpSpPr>
       <p:sp>
         <p:nvSpPr>
-          <p:cNvPr id="27" name="">
-            <a:extLst xmlns:a="http://schemas.openxmlformats.org/drawingml/2006/main">
-              <a:ext uri="{FF2B5EF4-FFF2-40B4-BE49-F238E27FC236}">
-                <a16:creationId xmlns:a16="http://schemas.microsoft.com/office/drawing/2014/main" id="{A7C79806-CBAF-4F13-A461-53F8422AA601}"/>
+          <p:cNvPr id="26" name="">
+            <a:extLst xmlns:a="http://schemas.openxmlformats.org/drawingml/2006/main">
+              <a:ext uri="{FF2B5EF4-FFF2-40B4-BE49-F238E27FC236}">
+                <a16:creationId xmlns:a16="http://schemas.microsoft.com/office/drawing/2014/main" id="{88E1194A-0CF3-4591-AB06-8D96CA4519C8}"/>
               </a:ext>
             </a:extLst>
           </p:cNvPr>
@@ -7804,7 +7804,7 @@
           <p:cNvPr id="2" name="">
             <a:extLst xmlns:a="http://schemas.openxmlformats.org/drawingml/2006/main">
               <a:ext uri="{FF2B5EF4-FFF2-40B4-BE49-F238E27FC236}">
-                <a16:creationId xmlns:a16="http://schemas.microsoft.com/office/drawing/2014/main" id="{BB887395-0A5D-432C-B61C-CA4B10F05F54}"/>
+                <a16:creationId xmlns:a16="http://schemas.microsoft.com/office/drawing/2014/main" id="{808D7DB9-7305-4EFD-AE11-5DA342FB28C3}"/>
               </a:ext>
             </a:extLst>
           </p:cNvPr>
@@ -7861,7 +7861,7 @@
           <p:cNvPr id="3" name="">
             <a:extLst xmlns:a="http://schemas.openxmlformats.org/drawingml/2006/main">
               <a:ext uri="{FF2B5EF4-FFF2-40B4-BE49-F238E27FC236}">
-                <a16:creationId xmlns:a16="http://schemas.microsoft.com/office/drawing/2014/main" id="{4207B925-8C1A-47B3-87EF-3863AC463F22}"/>
+                <a16:creationId xmlns:a16="http://schemas.microsoft.com/office/drawing/2014/main" id="{E9773321-C538-48C3-A469-F18A7A187E98}"/>
               </a:ext>
             </a:extLst>
           </p:cNvPr>
@@ -7893,7 +7893,7 @@
           <p:cNvPr id="4" name="">
             <a:extLst xmlns:a="http://schemas.openxmlformats.org/drawingml/2006/main">
               <a:ext uri="{FF2B5EF4-FFF2-40B4-BE49-F238E27FC236}">
-                <a16:creationId xmlns:a16="http://schemas.microsoft.com/office/drawing/2014/main" id="{DDE667F7-C9AC-449E-BE17-D9834F70CDC8}"/>
+                <a16:creationId xmlns:a16="http://schemas.microsoft.com/office/drawing/2014/main" id="{2DA75703-11A7-48D3-8D57-FB475A57911E}"/>
               </a:ext>
             </a:extLst>
           </p:cNvPr>
@@ -7950,7 +7950,7 @@
           <p:cNvPr id="5" name="">
             <a:extLst xmlns:a="http://schemas.openxmlformats.org/drawingml/2006/main">
               <a:ext uri="{FF2B5EF4-FFF2-40B4-BE49-F238E27FC236}">
-                <a16:creationId xmlns:a16="http://schemas.microsoft.com/office/drawing/2014/main" id="{13788329-7744-4E26-AA21-CDF241930C30}"/>
+                <a16:creationId xmlns:a16="http://schemas.microsoft.com/office/drawing/2014/main" id="{2CA74CC5-1A53-43C7-975C-D2252D00F7AC}"/>
               </a:ext>
             </a:extLst>
           </p:cNvPr>
@@ -8007,7 +8007,7 @@
           <p:cNvPr id="6" name="">
             <a:extLst xmlns:a="http://schemas.openxmlformats.org/drawingml/2006/main">
               <a:ext uri="{FF2B5EF4-FFF2-40B4-BE49-F238E27FC236}">
-                <a16:creationId xmlns:a16="http://schemas.microsoft.com/office/drawing/2014/main" id="{ABF8692F-5E39-40D0-A5CF-9D9017C2D598}"/>
+                <a16:creationId xmlns:a16="http://schemas.microsoft.com/office/drawing/2014/main" id="{B4BF8D1A-6A58-465F-BF7C-44878B39CCB2}"/>
               </a:ext>
             </a:extLst>
           </p:cNvPr>
@@ -8064,7 +8064,7 @@
           <p:cNvPr id="7" name="">
             <a:extLst xmlns:a="http://schemas.openxmlformats.org/drawingml/2006/main">
               <a:ext uri="{FF2B5EF4-FFF2-40B4-BE49-F238E27FC236}">
-                <a16:creationId xmlns:a16="http://schemas.microsoft.com/office/drawing/2014/main" id="{61A5C594-0F85-4395-AD5A-29498D8E9E49}"/>
+                <a16:creationId xmlns:a16="http://schemas.microsoft.com/office/drawing/2014/main" id="{6A1EC129-5E24-4E6C-9CA4-3903750A213D}"/>
               </a:ext>
             </a:extLst>
           </p:cNvPr>
@@ -8096,7 +8096,7 @@
           <p:cNvPr id="8" name="">
             <a:extLst xmlns:a="http://schemas.openxmlformats.org/drawingml/2006/main">
               <a:ext uri="{FF2B5EF4-FFF2-40B4-BE49-F238E27FC236}">
-                <a16:creationId xmlns:a16="http://schemas.microsoft.com/office/drawing/2014/main" id="{438CF72A-C325-454A-967C-A2511E4102EE}"/>
+                <a16:creationId xmlns:a16="http://schemas.microsoft.com/office/drawing/2014/main" id="{643B64FF-112D-4949-8575-3CF79BB0B6D4}"/>
               </a:ext>
             </a:extLst>
           </p:cNvPr>
@@ -8153,7 +8153,7 @@
           <p:cNvPr id="9" name="">
             <a:extLst xmlns:a="http://schemas.openxmlformats.org/drawingml/2006/main">
               <a:ext uri="{FF2B5EF4-FFF2-40B4-BE49-F238E27FC236}">
-                <a16:creationId xmlns:a16="http://schemas.microsoft.com/office/drawing/2014/main" id="{E94CC418-3B25-47E2-83C7-1D8187550DA8}"/>
+                <a16:creationId xmlns:a16="http://schemas.microsoft.com/office/drawing/2014/main" id="{82549B6C-03C8-4A21-8344-9BCB076453F4}"/>
               </a:ext>
             </a:extLst>
           </p:cNvPr>
@@ -8210,19 +8210,19 @@
           <p:cNvPr id="10" name="">
             <a:extLst xmlns:a="http://schemas.openxmlformats.org/drawingml/2006/main">
               <a:ext uri="{FF2B5EF4-FFF2-40B4-BE49-F238E27FC236}">
-                <a16:creationId xmlns:a16="http://schemas.microsoft.com/office/drawing/2014/main" id="{AE2C296F-C143-4D2A-B5BA-96C624B6D01A}"/>
-              </a:ext>
-            </a:extLst>
-          </p:cNvPr>
-          <p:cNvSpPr>
-            <a:spLocks xmlns:a="http://schemas.openxmlformats.org/drawingml/2006/main" noGrp="1"/>
-          </p:cNvSpPr>
-          <p:nvPr/>
-        </p:nvSpPr>
-        <p:spPr>
-          <a:xfrm xmlns:a="http://schemas.openxmlformats.org/drawingml/2006/main">
-            <a:off x="914400" y="1257300"/>
-            <a:ext cx="10363200" cy="781050"/>
+                <a16:creationId xmlns:a16="http://schemas.microsoft.com/office/drawing/2014/main" id="{0CCD332C-82EC-4E1D-93A0-FD940581094E}"/>
+              </a:ext>
+            </a:extLst>
+          </p:cNvPr>
+          <p:cNvSpPr>
+            <a:spLocks xmlns:a="http://schemas.openxmlformats.org/drawingml/2006/main" noGrp="1"/>
+          </p:cNvSpPr>
+          <p:nvPr/>
+        </p:nvSpPr>
+        <p:spPr>
+          <a:xfrm xmlns:a="http://schemas.openxmlformats.org/drawingml/2006/main">
+            <a:off x="857250" y="1219200"/>
+            <a:ext cx="10477500" cy="742950"/>
           </a:xfrm>
           <a:prstGeom xmlns:a="http://schemas.openxmlformats.org/drawingml/2006/main" prst="rect">
             <a:avLst/>
@@ -8239,7 +8239,7 @@
           <a:lstStyle xmlns:a="http://schemas.openxmlformats.org/drawingml/2006/main"/>
           <a:p xmlns:a="http://schemas.openxmlformats.org/drawingml/2006/main">
             <a:pPr algn="ctr">
-              <a:defRPr sz="2175" b="1">
+              <a:defRPr sz="2100" b="1">
                 <a:solidFill>
                   <a:srgbClr val="17253A"/>
                 </a:solidFill>
@@ -8249,7 +8249,7 @@
               </a:defRPr>
             </a:pPr>
             <a:r>
-              <a:rPr sz="2175" b="1">
+              <a:rPr sz="2100" b="1">
                 <a:solidFill>
                   <a:srgbClr val="17253A"/>
                 </a:solidFill>
@@ -8267,29 +8267,173 @@
           <p:cNvPr id="11" name="">
             <a:extLst xmlns:a="http://schemas.openxmlformats.org/drawingml/2006/main">
               <a:ext uri="{FF2B5EF4-FFF2-40B4-BE49-F238E27FC236}">
-                <a16:creationId xmlns:a16="http://schemas.microsoft.com/office/drawing/2014/main" id="{22802ACD-B8AB-4C27-B367-36209911F121}"/>
-              </a:ext>
-            </a:extLst>
-          </p:cNvPr>
-          <p:cNvSpPr>
-            <a:spLocks xmlns:a="http://schemas.openxmlformats.org/drawingml/2006/main" noGrp="1"/>
-          </p:cNvSpPr>
-          <p:nvPr/>
-        </p:nvSpPr>
-        <p:spPr>
-          <a:xfrm xmlns:a="http://schemas.openxmlformats.org/drawingml/2006/main">
-            <a:off x="781050" y="2171700"/>
-            <a:ext cx="10629900" cy="609600"/>
-          </a:xfrm>
-          <a:prstGeom xmlns:a="http://schemas.openxmlformats.org/drawingml/2006/main" prst="roundRect">
-            <a:avLst>
-              <a:gd name="adj" fmla="val 12500"/>
-            </a:avLst>
+                <a16:creationId xmlns:a16="http://schemas.microsoft.com/office/drawing/2014/main" id="{7A272671-8CCB-4B18-A106-027397F46166}"/>
+              </a:ext>
+            </a:extLst>
+          </p:cNvPr>
+          <p:cNvSpPr>
+            <a:spLocks xmlns:a="http://schemas.openxmlformats.org/drawingml/2006/main" noGrp="1"/>
+          </p:cNvSpPr>
+          <p:nvPr/>
+        </p:nvSpPr>
+        <p:spPr>
+          <a:xfrm xmlns:a="http://schemas.openxmlformats.org/drawingml/2006/main">
+            <a:off x="971550" y="2124075"/>
+            <a:ext cx="38100" cy="3524250"/>
+          </a:xfrm>
+          <a:prstGeom xmlns:a="http://schemas.openxmlformats.org/drawingml/2006/main" prst="rect">
+            <a:avLst/>
           </a:prstGeom>
           <a:solidFill xmlns:a="http://schemas.openxmlformats.org/drawingml/2006/main">
-            <a:srgbClr val="E7F1F1"/>
+            <a:srgbClr val="2C6E73"/>
           </a:solidFill>
-          <a:ln xmlns:a="http://schemas.openxmlformats.org/drawingml/2006/main" w="11430">
+          <a:ln xmlns:a="http://schemas.openxmlformats.org/drawingml/2006/main" w="0">
+            <a:solidFill>
+              <a:srgbClr val="2C6E73"/>
+            </a:solidFill>
+          </a:ln>
+        </p:spPr>
+      </p:sp>
+      <p:sp>
+        <p:nvSpPr>
+          <p:cNvPr id="12" name="">
+            <a:extLst xmlns:a="http://schemas.openxmlformats.org/drawingml/2006/main">
+              <a:ext uri="{FF2B5EF4-FFF2-40B4-BE49-F238E27FC236}">
+                <a16:creationId xmlns:a16="http://schemas.microsoft.com/office/drawing/2014/main" id="{C13AEA93-E7F0-412C-8ADB-79A8F4F2BD6B}"/>
+              </a:ext>
+            </a:extLst>
+          </p:cNvPr>
+          <p:cNvSpPr>
+            <a:spLocks xmlns:a="http://schemas.openxmlformats.org/drawingml/2006/main" noGrp="1"/>
+          </p:cNvSpPr>
+          <p:nvPr/>
+        </p:nvSpPr>
+        <p:spPr>
+          <a:xfrm xmlns:a="http://schemas.openxmlformats.org/drawingml/2006/main">
+            <a:off x="1162050" y="2200275"/>
+            <a:ext cx="400050" cy="400050"/>
+          </a:xfrm>
+          <a:prstGeom xmlns:a="http://schemas.openxmlformats.org/drawingml/2006/main" prst="rect">
+            <a:avLst/>
+          </a:prstGeom>
+          <a:noFill xmlns:a="http://schemas.openxmlformats.org/drawingml/2006/main"/>
+          <a:ln xmlns:a="http://schemas.openxmlformats.org/drawingml/2006/main" w="0">
+            <a:noFill/>
+          </a:ln>
+        </p:spPr>
+        <p:txBody>
+          <a:bodyPr xmlns:a="http://schemas.openxmlformats.org/drawingml/2006/main" anchor="ctr">
+            <a:normAutofit fontScale="100000"/>
+          </a:bodyPr>
+          <a:lstStyle xmlns:a="http://schemas.openxmlformats.org/drawingml/2006/main"/>
+          <a:p xmlns:a="http://schemas.openxmlformats.org/drawingml/2006/main">
+            <a:pPr algn="ctr">
+              <a:defRPr sz="1125" b="1">
+                <a:solidFill>
+                  <a:srgbClr val="2C6E73"/>
+                </a:solidFill>
+                <a:latin typeface="Arial"/>
+                <a:ea typeface="Arial"/>
+                <a:cs typeface="Arial"/>
+              </a:defRPr>
+            </a:pPr>
+            <a:r>
+              <a:rPr sz="1125" b="1">
+                <a:solidFill>
+                  <a:srgbClr val="2C6E73"/>
+                </a:solidFill>
+                <a:latin typeface="Arial"/>
+                <a:ea typeface="Arial"/>
+                <a:cs typeface="Arial"/>
+              </a:rPr>
+              <a:t>1</a:t>
+            </a:r>
+          </a:p>
+        </p:txBody>
+      </p:sp>
+      <p:sp>
+        <p:nvSpPr>
+          <p:cNvPr id="13" name="">
+            <a:extLst xmlns:a="http://schemas.openxmlformats.org/drawingml/2006/main">
+              <a:ext uri="{FF2B5EF4-FFF2-40B4-BE49-F238E27FC236}">
+                <a16:creationId xmlns:a16="http://schemas.microsoft.com/office/drawing/2014/main" id="{98CE40FA-84D5-4557-A024-E7C2475DF24A}"/>
+              </a:ext>
+            </a:extLst>
+          </p:cNvPr>
+          <p:cNvSpPr>
+            <a:spLocks xmlns:a="http://schemas.openxmlformats.org/drawingml/2006/main" noGrp="1"/>
+          </p:cNvSpPr>
+          <p:nvPr/>
+        </p:nvSpPr>
+        <p:spPr>
+          <a:xfrm xmlns:a="http://schemas.openxmlformats.org/drawingml/2006/main">
+            <a:off x="1714500" y="2114550"/>
+            <a:ext cx="9525000" cy="638175"/>
+          </a:xfrm>
+          <a:prstGeom xmlns:a="http://schemas.openxmlformats.org/drawingml/2006/main" prst="rect">
+            <a:avLst/>
+          </a:prstGeom>
+          <a:noFill xmlns:a="http://schemas.openxmlformats.org/drawingml/2006/main"/>
+          <a:ln xmlns:a="http://schemas.openxmlformats.org/drawingml/2006/main" w="0">
+            <a:noFill/>
+          </a:ln>
+        </p:spPr>
+        <p:txBody>
+          <a:bodyPr xmlns:a="http://schemas.openxmlformats.org/drawingml/2006/main" anchor="ctr">
+            <a:normAutofit fontScale="100000"/>
+          </a:bodyPr>
+          <a:lstStyle xmlns:a="http://schemas.openxmlformats.org/drawingml/2006/main"/>
+          <a:p xmlns:a="http://schemas.openxmlformats.org/drawingml/2006/main">
+            <a:pPr algn="l">
+              <a:defRPr sz="1575" b="0">
+                <a:solidFill>
+                  <a:srgbClr val="17253A"/>
+                </a:solidFill>
+                <a:latin typeface="Arial"/>
+                <a:ea typeface="Arial"/>
+                <a:cs typeface="Arial"/>
+              </a:defRPr>
+            </a:pPr>
+            <a:r>
+              <a:rPr sz="1575" b="0">
+                <a:solidFill>
+                  <a:srgbClr val="17253A"/>
+                </a:solidFill>
+                <a:latin typeface="Arial"/>
+                <a:ea typeface="Arial"/>
+                <a:cs typeface="Arial"/>
+              </a:rPr>
+              <a:t>2,304 × 27</a:t>
+            </a:r>
+          </a:p>
+        </p:txBody>
+      </p:sp>
+      <p:sp>
+        <p:nvSpPr>
+          <p:cNvPr id="14" name="">
+            <a:extLst xmlns:a="http://schemas.openxmlformats.org/drawingml/2006/main">
+              <a:ext uri="{FF2B5EF4-FFF2-40B4-BE49-F238E27FC236}">
+                <a16:creationId xmlns:a16="http://schemas.microsoft.com/office/drawing/2014/main" id="{B361A0DA-BE42-42A9-853E-0275FD447CA6}"/>
+              </a:ext>
+            </a:extLst>
+          </p:cNvPr>
+          <p:cNvSpPr>
+            <a:spLocks xmlns:a="http://schemas.openxmlformats.org/drawingml/2006/main" noGrp="1"/>
+          </p:cNvSpPr>
+          <p:nvPr/>
+        </p:nvSpPr>
+        <p:spPr>
+          <a:xfrm xmlns:a="http://schemas.openxmlformats.org/drawingml/2006/main">
+            <a:off x="1714500" y="2771775"/>
+            <a:ext cx="9334500" cy="9525"/>
+          </a:xfrm>
+          <a:prstGeom xmlns:a="http://schemas.openxmlformats.org/drawingml/2006/main" prst="rect">
+            <a:avLst/>
+          </a:prstGeom>
+          <a:solidFill xmlns:a="http://schemas.openxmlformats.org/drawingml/2006/main">
+            <a:srgbClr val="D9E0E6"/>
+          </a:solidFill>
+          <a:ln xmlns:a="http://schemas.openxmlformats.org/drawingml/2006/main" w="0">
             <a:solidFill>
               <a:srgbClr val="D9E0E6"/>
             </a:solidFill>
@@ -8298,22 +8442,22 @@
       </p:sp>
       <p:sp>
         <p:nvSpPr>
-          <p:cNvPr id="12" name="">
-            <a:extLst xmlns:a="http://schemas.openxmlformats.org/drawingml/2006/main">
-              <a:ext uri="{FF2B5EF4-FFF2-40B4-BE49-F238E27FC236}">
-                <a16:creationId xmlns:a16="http://schemas.microsoft.com/office/drawing/2014/main" id="{3FDED4B1-0868-40A6-96FB-463FAEC5234F}"/>
-              </a:ext>
-            </a:extLst>
-          </p:cNvPr>
-          <p:cNvSpPr>
-            <a:spLocks xmlns:a="http://schemas.openxmlformats.org/drawingml/2006/main" noGrp="1"/>
-          </p:cNvSpPr>
-          <p:nvPr/>
-        </p:nvSpPr>
-        <p:spPr>
-          <a:xfrm xmlns:a="http://schemas.openxmlformats.org/drawingml/2006/main">
-            <a:off x="952500" y="2266950"/>
-            <a:ext cx="3238500" cy="419100"/>
+          <p:cNvPr id="15" name="">
+            <a:extLst xmlns:a="http://schemas.openxmlformats.org/drawingml/2006/main">
+              <a:ext uri="{FF2B5EF4-FFF2-40B4-BE49-F238E27FC236}">
+                <a16:creationId xmlns:a16="http://schemas.microsoft.com/office/drawing/2014/main" id="{22419488-0A33-453B-9188-8F388ACD8F57}"/>
+              </a:ext>
+            </a:extLst>
+          </p:cNvPr>
+          <p:cNvSpPr>
+            <a:spLocks xmlns:a="http://schemas.openxmlformats.org/drawingml/2006/main" noGrp="1"/>
+          </p:cNvSpPr>
+          <p:nvPr/>
+        </p:nvSpPr>
+        <p:spPr>
+          <a:xfrm xmlns:a="http://schemas.openxmlformats.org/drawingml/2006/main">
+            <a:off x="1162050" y="2905125"/>
+            <a:ext cx="400050" cy="400050"/>
           </a:xfrm>
           <a:prstGeom xmlns:a="http://schemas.openxmlformats.org/drawingml/2006/main" prst="rect">
             <a:avLst/>
@@ -8348,29 +8492,29 @@
                 <a:ea typeface="Arial"/>
                 <a:cs typeface="Arial"/>
               </a:rPr>
-              <a:t>Ones row: 2304 × 7 = 16128</a:t>
-            </a:r>
-          </a:p>
-        </p:txBody>
-      </p:sp>
-      <p:sp>
-        <p:nvSpPr>
-          <p:cNvPr id="13" name="">
-            <a:extLst xmlns:a="http://schemas.openxmlformats.org/drawingml/2006/main">
-              <a:ext uri="{FF2B5EF4-FFF2-40B4-BE49-F238E27FC236}">
-                <a16:creationId xmlns:a16="http://schemas.microsoft.com/office/drawing/2014/main" id="{E78C5A17-E78F-40CF-8F5D-AD984B8798D7}"/>
-              </a:ext>
-            </a:extLst>
-          </p:cNvPr>
-          <p:cNvSpPr>
-            <a:spLocks xmlns:a="http://schemas.openxmlformats.org/drawingml/2006/main" noGrp="1"/>
-          </p:cNvSpPr>
-          <p:nvPr/>
-        </p:nvSpPr>
-        <p:spPr>
-          <a:xfrm xmlns:a="http://schemas.openxmlformats.org/drawingml/2006/main">
-            <a:off x="4381500" y="2266950"/>
-            <a:ext cx="3238500" cy="419100"/>
+              <a:t>2</a:t>
+            </a:r>
+          </a:p>
+        </p:txBody>
+      </p:sp>
+      <p:sp>
+        <p:nvSpPr>
+          <p:cNvPr id="16" name="">
+            <a:extLst xmlns:a="http://schemas.openxmlformats.org/drawingml/2006/main">
+              <a:ext uri="{FF2B5EF4-FFF2-40B4-BE49-F238E27FC236}">
+                <a16:creationId xmlns:a16="http://schemas.microsoft.com/office/drawing/2014/main" id="{81F29861-7A2F-4752-81A9-61C3346FD1BB}"/>
+              </a:ext>
+            </a:extLst>
+          </p:cNvPr>
+          <p:cNvSpPr>
+            <a:spLocks xmlns:a="http://schemas.openxmlformats.org/drawingml/2006/main" noGrp="1"/>
+          </p:cNvSpPr>
+          <p:nvPr/>
+        </p:nvSpPr>
+        <p:spPr>
+          <a:xfrm xmlns:a="http://schemas.openxmlformats.org/drawingml/2006/main">
+            <a:off x="1714500" y="2819400"/>
+            <a:ext cx="9525000" cy="638175"/>
           </a:xfrm>
           <a:prstGeom xmlns:a="http://schemas.openxmlformats.org/drawingml/2006/main" prst="rect">
             <a:avLst/>
@@ -8386,10 +8530,10 @@
           </a:bodyPr>
           <a:lstStyle xmlns:a="http://schemas.openxmlformats.org/drawingml/2006/main"/>
           <a:p xmlns:a="http://schemas.openxmlformats.org/drawingml/2006/main">
-            <a:pPr algn="ctr">
-              <a:defRPr sz="1125" b="1">
-                <a:solidFill>
-                  <a:srgbClr val="2C6E73"/>
+            <a:pPr algn="l">
+              <a:defRPr sz="1575" b="0">
+                <a:solidFill>
+                  <a:srgbClr val="17253A"/>
                 </a:solidFill>
                 <a:latin typeface="Arial"/>
                 <a:ea typeface="Arial"/>
@@ -8397,124 +8541,69 @@
               </a:defRPr>
             </a:pPr>
             <a:r>
-              <a:rPr sz="1125" b="1">
-                <a:solidFill>
-                  <a:srgbClr val="2C6E73"/>
+              <a:rPr sz="1575" b="0">
+                <a:solidFill>
+                  <a:srgbClr val="17253A"/>
                 </a:solidFill>
                 <a:latin typeface="Arial"/>
                 <a:ea typeface="Arial"/>
                 <a:cs typeface="Arial"/>
               </a:rPr>
-              <a:t>Tens row: 2304 × 20 = 46080</a:t>
-            </a:r>
-          </a:p>
-        </p:txBody>
-      </p:sp>
-      <p:sp>
-        <p:nvSpPr>
-          <p:cNvPr id="14" name="">
-            <a:extLst xmlns:a="http://schemas.openxmlformats.org/drawingml/2006/main">
-              <a:ext uri="{FF2B5EF4-FFF2-40B4-BE49-F238E27FC236}">
-                <a16:creationId xmlns:a16="http://schemas.microsoft.com/office/drawing/2014/main" id="{76D1AF59-ACA1-416C-81CB-72EB055BB011}"/>
-              </a:ext>
-            </a:extLst>
-          </p:cNvPr>
-          <p:cNvSpPr>
-            <a:spLocks xmlns:a="http://schemas.openxmlformats.org/drawingml/2006/main" noGrp="1"/>
-          </p:cNvSpPr>
-          <p:nvPr/>
-        </p:nvSpPr>
-        <p:spPr>
-          <a:xfrm xmlns:a="http://schemas.openxmlformats.org/drawingml/2006/main">
-            <a:off x="7810500" y="2266950"/>
-            <a:ext cx="3238500" cy="419100"/>
-          </a:xfrm>
-          <a:prstGeom xmlns:a="http://schemas.openxmlformats.org/drawingml/2006/main" prst="rect">
-            <a:avLst/>
-          </a:prstGeom>
-          <a:noFill xmlns:a="http://schemas.openxmlformats.org/drawingml/2006/main"/>
-          <a:ln xmlns:a="http://schemas.openxmlformats.org/drawingml/2006/main" w="0">
-            <a:noFill/>
-          </a:ln>
-        </p:spPr>
-        <p:txBody>
-          <a:bodyPr xmlns:a="http://schemas.openxmlformats.org/drawingml/2006/main" anchor="ctr">
-            <a:normAutofit fontScale="95556"/>
-          </a:bodyPr>
-          <a:lstStyle xmlns:a="http://schemas.openxmlformats.org/drawingml/2006/main"/>
-          <a:p xmlns:a="http://schemas.openxmlformats.org/drawingml/2006/main">
-            <a:pPr algn="ctr">
-              <a:defRPr sz="1125" b="1">
-                <a:solidFill>
-                  <a:srgbClr val="2C6E73"/>
-                </a:solidFill>
-                <a:latin typeface="Arial"/>
-                <a:ea typeface="Arial"/>
-                <a:cs typeface="Arial"/>
-              </a:defRPr>
-            </a:pPr>
-            <a:r>
-              <a:rPr sz="1125" b="1">
-                <a:solidFill>
-                  <a:srgbClr val="2C6E73"/>
-                </a:solidFill>
-                <a:latin typeface="Arial"/>
-                <a:ea typeface="Arial"/>
-                <a:cs typeface="Arial"/>
-              </a:rPr>
-              <a:t>Estimate first: Estimate the product before calculating.</a:t>
-            </a:r>
-          </a:p>
-        </p:txBody>
-      </p:sp>
-      <p:sp>
-        <p:nvSpPr>
-          <p:cNvPr id="15" name="">
-            <a:extLst xmlns:a="http://schemas.openxmlformats.org/drawingml/2006/main">
-              <a:ext uri="{FF2B5EF4-FFF2-40B4-BE49-F238E27FC236}">
-                <a16:creationId xmlns:a16="http://schemas.microsoft.com/office/drawing/2014/main" id="{B3356FDC-1F32-469B-A59F-42778562B1BF}"/>
-              </a:ext>
-            </a:extLst>
-          </p:cNvPr>
-          <p:cNvSpPr>
-            <a:spLocks xmlns:a="http://schemas.openxmlformats.org/drawingml/2006/main" noGrp="1"/>
-          </p:cNvSpPr>
-          <p:nvPr/>
-        </p:nvSpPr>
-        <p:spPr>
-          <a:xfrm xmlns:a="http://schemas.openxmlformats.org/drawingml/2006/main">
-            <a:off x="1000125" y="3028950"/>
-            <a:ext cx="476250" cy="476250"/>
-          </a:xfrm>
-          <a:prstGeom xmlns:a="http://schemas.openxmlformats.org/drawingml/2006/main" prst="ellipse">
+              <a:t>2,304 × 7 = 16,128</a:t>
+            </a:r>
+          </a:p>
+        </p:txBody>
+      </p:sp>
+      <p:sp>
+        <p:nvSpPr>
+          <p:cNvPr id="17" name="">
+            <a:extLst xmlns:a="http://schemas.openxmlformats.org/drawingml/2006/main">
+              <a:ext uri="{FF2B5EF4-FFF2-40B4-BE49-F238E27FC236}">
+                <a16:creationId xmlns:a16="http://schemas.microsoft.com/office/drawing/2014/main" id="{85657457-E19D-4F47-9694-4D98A2762B15}"/>
+              </a:ext>
+            </a:extLst>
+          </p:cNvPr>
+          <p:cNvSpPr>
+            <a:spLocks xmlns:a="http://schemas.openxmlformats.org/drawingml/2006/main" noGrp="1"/>
+          </p:cNvSpPr>
+          <p:nvPr/>
+        </p:nvSpPr>
+        <p:spPr>
+          <a:xfrm xmlns:a="http://schemas.openxmlformats.org/drawingml/2006/main">
+            <a:off x="1714500" y="3476625"/>
+            <a:ext cx="9334500" cy="9525"/>
+          </a:xfrm>
+          <a:prstGeom xmlns:a="http://schemas.openxmlformats.org/drawingml/2006/main" prst="rect">
             <a:avLst/>
           </a:prstGeom>
           <a:solidFill xmlns:a="http://schemas.openxmlformats.org/drawingml/2006/main">
-            <a:srgbClr val="18324A"/>
+            <a:srgbClr val="D9E0E6"/>
           </a:solidFill>
           <a:ln xmlns:a="http://schemas.openxmlformats.org/drawingml/2006/main" w="0">
-            <a:noFill/>
-          </a:ln>
-        </p:spPr>
-      </p:sp>
-      <p:sp>
-        <p:nvSpPr>
-          <p:cNvPr id="16" name="">
-            <a:extLst xmlns:a="http://schemas.openxmlformats.org/drawingml/2006/main">
-              <a:ext uri="{FF2B5EF4-FFF2-40B4-BE49-F238E27FC236}">
-                <a16:creationId xmlns:a16="http://schemas.microsoft.com/office/drawing/2014/main" id="{E79C7E70-AC9F-4A8B-8D16-D60F86B9B40E}"/>
-              </a:ext>
-            </a:extLst>
-          </p:cNvPr>
-          <p:cNvSpPr>
-            <a:spLocks xmlns:a="http://schemas.openxmlformats.org/drawingml/2006/main" noGrp="1"/>
-          </p:cNvSpPr>
-          <p:nvPr/>
-        </p:nvSpPr>
-        <p:spPr>
-          <a:xfrm xmlns:a="http://schemas.openxmlformats.org/drawingml/2006/main">
-            <a:off x="1000125" y="3057525"/>
-            <a:ext cx="476250" cy="419100"/>
+            <a:solidFill>
+              <a:srgbClr val="D9E0E6"/>
+            </a:solidFill>
+          </a:ln>
+        </p:spPr>
+      </p:sp>
+      <p:sp>
+        <p:nvSpPr>
+          <p:cNvPr id="18" name="">
+            <a:extLst xmlns:a="http://schemas.openxmlformats.org/drawingml/2006/main">
+              <a:ext uri="{FF2B5EF4-FFF2-40B4-BE49-F238E27FC236}">
+                <a16:creationId xmlns:a16="http://schemas.microsoft.com/office/drawing/2014/main" id="{C9F290EF-CA4E-4980-9847-3FFBF97A438A}"/>
+              </a:ext>
+            </a:extLst>
+          </p:cNvPr>
+          <p:cNvSpPr>
+            <a:spLocks xmlns:a="http://schemas.openxmlformats.org/drawingml/2006/main" noGrp="1"/>
+          </p:cNvSpPr>
+          <p:nvPr/>
+        </p:nvSpPr>
+        <p:spPr>
+          <a:xfrm xmlns:a="http://schemas.openxmlformats.org/drawingml/2006/main">
+            <a:off x="1162050" y="3609975"/>
+            <a:ext cx="400050" cy="400050"/>
           </a:xfrm>
           <a:prstGeom xmlns:a="http://schemas.openxmlformats.org/drawingml/2006/main" prst="rect">
             <a:avLst/>
@@ -8531,9 +8620,9 @@
           <a:lstStyle xmlns:a="http://schemas.openxmlformats.org/drawingml/2006/main"/>
           <a:p xmlns:a="http://schemas.openxmlformats.org/drawingml/2006/main">
             <a:pPr algn="ctr">
-              <a:defRPr sz="1350" b="1">
-                <a:solidFill>
-                  <a:srgbClr val="FFFFFF"/>
+              <a:defRPr sz="1125" b="1">
+                <a:solidFill>
+                  <a:srgbClr val="2C6E73"/>
                 </a:solidFill>
                 <a:latin typeface="Arial"/>
                 <a:ea typeface="Arial"/>
@@ -8541,37 +8630,37 @@
               </a:defRPr>
             </a:pPr>
             <a:r>
-              <a:rPr sz="1350" b="1">
-                <a:solidFill>
-                  <a:srgbClr val="FFFFFF"/>
+              <a:rPr sz="1125" b="1">
+                <a:solidFill>
+                  <a:srgbClr val="2C6E73"/>
                 </a:solidFill>
                 <a:latin typeface="Arial"/>
                 <a:ea typeface="Arial"/>
                 <a:cs typeface="Arial"/>
               </a:rPr>
-              <a:t>1</a:t>
-            </a:r>
-          </a:p>
-        </p:txBody>
-      </p:sp>
-      <p:sp>
-        <p:nvSpPr>
-          <p:cNvPr id="17" name="">
-            <a:extLst xmlns:a="http://schemas.openxmlformats.org/drawingml/2006/main">
-              <a:ext uri="{FF2B5EF4-FFF2-40B4-BE49-F238E27FC236}">
-                <a16:creationId xmlns:a16="http://schemas.microsoft.com/office/drawing/2014/main" id="{890F8DE6-8C39-4AF0-90BA-6E8838EC16E9}"/>
-              </a:ext>
-            </a:extLst>
-          </p:cNvPr>
-          <p:cNvSpPr>
-            <a:spLocks xmlns:a="http://schemas.openxmlformats.org/drawingml/2006/main" noGrp="1"/>
-          </p:cNvSpPr>
-          <p:nvPr/>
-        </p:nvSpPr>
-        <p:spPr>
-          <a:xfrm xmlns:a="http://schemas.openxmlformats.org/drawingml/2006/main">
-            <a:off x="1714500" y="2962275"/>
-            <a:ext cx="9429750" cy="609600"/>
+              <a:t>3</a:t>
+            </a:r>
+          </a:p>
+        </p:txBody>
+      </p:sp>
+      <p:sp>
+        <p:nvSpPr>
+          <p:cNvPr id="19" name="">
+            <a:extLst xmlns:a="http://schemas.openxmlformats.org/drawingml/2006/main">
+              <a:ext uri="{FF2B5EF4-FFF2-40B4-BE49-F238E27FC236}">
+                <a16:creationId xmlns:a16="http://schemas.microsoft.com/office/drawing/2014/main" id="{6FAA5A37-3350-4EB4-A160-E11BAEF0B68A}"/>
+              </a:ext>
+            </a:extLst>
+          </p:cNvPr>
+          <p:cNvSpPr>
+            <a:spLocks xmlns:a="http://schemas.openxmlformats.org/drawingml/2006/main" noGrp="1"/>
+          </p:cNvSpPr>
+          <p:nvPr/>
+        </p:nvSpPr>
+        <p:spPr>
+          <a:xfrm xmlns:a="http://schemas.openxmlformats.org/drawingml/2006/main">
+            <a:off x="1714500" y="3524250"/>
+            <a:ext cx="9525000" cy="638175"/>
           </a:xfrm>
           <a:prstGeom xmlns:a="http://schemas.openxmlformats.org/drawingml/2006/main" prst="rect">
             <a:avLst/>
@@ -8588,7 +8677,7 @@
           <a:lstStyle xmlns:a="http://schemas.openxmlformats.org/drawingml/2006/main"/>
           <a:p xmlns:a="http://schemas.openxmlformats.org/drawingml/2006/main">
             <a:pPr algn="l">
-              <a:defRPr sz="1500" b="0">
+              <a:defRPr sz="1575" b="0">
                 <a:solidFill>
                   <a:srgbClr val="17253A"/>
                 </a:solidFill>
@@ -8598,7 +8687,7 @@
               </a:defRPr>
             </a:pPr>
             <a:r>
-              <a:rPr sz="1500" b="0">
+              <a:rPr sz="1575" b="0">
                 <a:solidFill>
                   <a:srgbClr val="17253A"/>
                 </a:solidFill>
@@ -8606,59 +8695,61 @@
                 <a:ea typeface="Arial"/>
                 <a:cs typeface="Arial"/>
               </a:rPr>
-              <a:t>Write 2304 × 27 in place-value columns.</a:t>
-            </a:r>
-          </a:p>
-        </p:txBody>
-      </p:sp>
-      <p:sp>
-        <p:nvSpPr>
-          <p:cNvPr id="18" name="">
-            <a:extLst xmlns:a="http://schemas.openxmlformats.org/drawingml/2006/main">
-              <a:ext uri="{FF2B5EF4-FFF2-40B4-BE49-F238E27FC236}">
-                <a16:creationId xmlns:a16="http://schemas.microsoft.com/office/drawing/2014/main" id="{9D41464A-D985-4F1C-9FCE-74FA4033AB02}"/>
-              </a:ext>
-            </a:extLst>
-          </p:cNvPr>
-          <p:cNvSpPr>
-            <a:spLocks xmlns:a="http://schemas.openxmlformats.org/drawingml/2006/main" noGrp="1"/>
-          </p:cNvSpPr>
-          <p:nvPr/>
-        </p:nvSpPr>
-        <p:spPr>
-          <a:xfrm xmlns:a="http://schemas.openxmlformats.org/drawingml/2006/main">
-            <a:off x="1000125" y="3771900"/>
-            <a:ext cx="476250" cy="476250"/>
-          </a:xfrm>
-          <a:prstGeom xmlns:a="http://schemas.openxmlformats.org/drawingml/2006/main" prst="ellipse">
+              <a:t>2,304 × 20 = 46,080</a:t>
+            </a:r>
+          </a:p>
+        </p:txBody>
+      </p:sp>
+      <p:sp>
+        <p:nvSpPr>
+          <p:cNvPr id="20" name="">
+            <a:extLst xmlns:a="http://schemas.openxmlformats.org/drawingml/2006/main">
+              <a:ext uri="{FF2B5EF4-FFF2-40B4-BE49-F238E27FC236}">
+                <a16:creationId xmlns:a16="http://schemas.microsoft.com/office/drawing/2014/main" id="{84D8ED02-59DE-4131-BE63-A1FAC907E1C6}"/>
+              </a:ext>
+            </a:extLst>
+          </p:cNvPr>
+          <p:cNvSpPr>
+            <a:spLocks xmlns:a="http://schemas.openxmlformats.org/drawingml/2006/main" noGrp="1"/>
+          </p:cNvSpPr>
+          <p:nvPr/>
+        </p:nvSpPr>
+        <p:spPr>
+          <a:xfrm xmlns:a="http://schemas.openxmlformats.org/drawingml/2006/main">
+            <a:off x="1714500" y="4181475"/>
+            <a:ext cx="9334500" cy="9525"/>
+          </a:xfrm>
+          <a:prstGeom xmlns:a="http://schemas.openxmlformats.org/drawingml/2006/main" prst="rect">
             <a:avLst/>
           </a:prstGeom>
           <a:solidFill xmlns:a="http://schemas.openxmlformats.org/drawingml/2006/main">
-            <a:srgbClr val="2C6E73"/>
+            <a:srgbClr val="D9E0E6"/>
           </a:solidFill>
           <a:ln xmlns:a="http://schemas.openxmlformats.org/drawingml/2006/main" w="0">
-            <a:noFill/>
-          </a:ln>
-        </p:spPr>
-      </p:sp>
-      <p:sp>
-        <p:nvSpPr>
-          <p:cNvPr id="19" name="">
-            <a:extLst xmlns:a="http://schemas.openxmlformats.org/drawingml/2006/main">
-              <a:ext uri="{FF2B5EF4-FFF2-40B4-BE49-F238E27FC236}">
-                <a16:creationId xmlns:a16="http://schemas.microsoft.com/office/drawing/2014/main" id="{AA55835E-554E-444D-B678-B566147EB2D3}"/>
-              </a:ext>
-            </a:extLst>
-          </p:cNvPr>
-          <p:cNvSpPr>
-            <a:spLocks xmlns:a="http://schemas.openxmlformats.org/drawingml/2006/main" noGrp="1"/>
-          </p:cNvSpPr>
-          <p:nvPr/>
-        </p:nvSpPr>
-        <p:spPr>
-          <a:xfrm xmlns:a="http://schemas.openxmlformats.org/drawingml/2006/main">
-            <a:off x="1000125" y="3800475"/>
-            <a:ext cx="476250" cy="419100"/>
+            <a:solidFill>
+              <a:srgbClr val="D9E0E6"/>
+            </a:solidFill>
+          </a:ln>
+        </p:spPr>
+      </p:sp>
+      <p:sp>
+        <p:nvSpPr>
+          <p:cNvPr id="21" name="">
+            <a:extLst xmlns:a="http://schemas.openxmlformats.org/drawingml/2006/main">
+              <a:ext uri="{FF2B5EF4-FFF2-40B4-BE49-F238E27FC236}">
+                <a16:creationId xmlns:a16="http://schemas.microsoft.com/office/drawing/2014/main" id="{F0ACF163-7952-4E80-8F51-9EC057E279F5}"/>
+              </a:ext>
+            </a:extLst>
+          </p:cNvPr>
+          <p:cNvSpPr>
+            <a:spLocks xmlns:a="http://schemas.openxmlformats.org/drawingml/2006/main" noGrp="1"/>
+          </p:cNvSpPr>
+          <p:nvPr/>
+        </p:nvSpPr>
+        <p:spPr>
+          <a:xfrm xmlns:a="http://schemas.openxmlformats.org/drawingml/2006/main">
+            <a:off x="1162050" y="4314825"/>
+            <a:ext cx="400050" cy="400050"/>
           </a:xfrm>
           <a:prstGeom xmlns:a="http://schemas.openxmlformats.org/drawingml/2006/main" prst="rect">
             <a:avLst/>
@@ -8675,9 +8766,9 @@
           <a:lstStyle xmlns:a="http://schemas.openxmlformats.org/drawingml/2006/main"/>
           <a:p xmlns:a="http://schemas.openxmlformats.org/drawingml/2006/main">
             <a:pPr algn="ctr">
-              <a:defRPr sz="1350" b="1">
-                <a:solidFill>
-                  <a:srgbClr val="FFFFFF"/>
+              <a:defRPr sz="1125" b="1">
+                <a:solidFill>
+                  <a:srgbClr val="2C6E73"/>
                 </a:solidFill>
                 <a:latin typeface="Arial"/>
                 <a:ea typeface="Arial"/>
@@ -8685,37 +8776,37 @@
               </a:defRPr>
             </a:pPr>
             <a:r>
-              <a:rPr sz="1350" b="1">
-                <a:solidFill>
-                  <a:srgbClr val="FFFFFF"/>
+              <a:rPr sz="1125" b="1">
+                <a:solidFill>
+                  <a:srgbClr val="2C6E73"/>
                 </a:solidFill>
                 <a:latin typeface="Arial"/>
                 <a:ea typeface="Arial"/>
                 <a:cs typeface="Arial"/>
               </a:rPr>
-              <a:t>2</a:t>
-            </a:r>
-          </a:p>
-        </p:txBody>
-      </p:sp>
-      <p:sp>
-        <p:nvSpPr>
-          <p:cNvPr id="20" name="">
-            <a:extLst xmlns:a="http://schemas.openxmlformats.org/drawingml/2006/main">
-              <a:ext uri="{FF2B5EF4-FFF2-40B4-BE49-F238E27FC236}">
-                <a16:creationId xmlns:a16="http://schemas.microsoft.com/office/drawing/2014/main" id="{CE6AE094-33DB-4A50-B1D4-FB56A0C98FE1}"/>
-              </a:ext>
-            </a:extLst>
-          </p:cNvPr>
-          <p:cNvSpPr>
-            <a:spLocks xmlns:a="http://schemas.openxmlformats.org/drawingml/2006/main" noGrp="1"/>
-          </p:cNvSpPr>
-          <p:nvPr/>
-        </p:nvSpPr>
-        <p:spPr>
-          <a:xfrm xmlns:a="http://schemas.openxmlformats.org/drawingml/2006/main">
-            <a:off x="1714500" y="3705225"/>
-            <a:ext cx="9429750" cy="609600"/>
+              <a:t>4</a:t>
+            </a:r>
+          </a:p>
+        </p:txBody>
+      </p:sp>
+      <p:sp>
+        <p:nvSpPr>
+          <p:cNvPr id="22" name="">
+            <a:extLst xmlns:a="http://schemas.openxmlformats.org/drawingml/2006/main">
+              <a:ext uri="{FF2B5EF4-FFF2-40B4-BE49-F238E27FC236}">
+                <a16:creationId xmlns:a16="http://schemas.microsoft.com/office/drawing/2014/main" id="{F4F40793-473E-49AA-832F-9B1224EF49EC}"/>
+              </a:ext>
+            </a:extLst>
+          </p:cNvPr>
+          <p:cNvSpPr>
+            <a:spLocks xmlns:a="http://schemas.openxmlformats.org/drawingml/2006/main" noGrp="1"/>
+          </p:cNvSpPr>
+          <p:nvPr/>
+        </p:nvSpPr>
+        <p:spPr>
+          <a:xfrm xmlns:a="http://schemas.openxmlformats.org/drawingml/2006/main">
+            <a:off x="1714500" y="4229100"/>
+            <a:ext cx="9525000" cy="638175"/>
           </a:xfrm>
           <a:prstGeom xmlns:a="http://schemas.openxmlformats.org/drawingml/2006/main" prst="rect">
             <a:avLst/>
@@ -8732,7 +8823,7 @@
           <a:lstStyle xmlns:a="http://schemas.openxmlformats.org/drawingml/2006/main"/>
           <a:p xmlns:a="http://schemas.openxmlformats.org/drawingml/2006/main">
             <a:pPr algn="l">
-              <a:defRPr sz="1500" b="0">
+              <a:defRPr sz="1575" b="0">
                 <a:solidFill>
                   <a:srgbClr val="17253A"/>
                 </a:solidFill>
@@ -8742,7 +8833,7 @@
               </a:defRPr>
             </a:pPr>
             <a:r>
-              <a:rPr sz="1500" b="0">
+              <a:rPr sz="1575" b="0">
                 <a:solidFill>
                   <a:srgbClr val="17253A"/>
                 </a:solidFill>
@@ -8750,59 +8841,61 @@
                 <a:ea typeface="Arial"/>
                 <a:cs typeface="Arial"/>
               </a:rPr>
-              <a:t>Multiply by 7: first partial product 16128.</a:t>
-            </a:r>
-          </a:p>
-        </p:txBody>
-      </p:sp>
-      <p:sp>
-        <p:nvSpPr>
-          <p:cNvPr id="21" name="">
-            <a:extLst xmlns:a="http://schemas.openxmlformats.org/drawingml/2006/main">
-              <a:ext uri="{FF2B5EF4-FFF2-40B4-BE49-F238E27FC236}">
-                <a16:creationId xmlns:a16="http://schemas.microsoft.com/office/drawing/2014/main" id="{3D860C7C-8FD6-4ABC-94A1-268336A545FB}"/>
-              </a:ext>
-            </a:extLst>
-          </p:cNvPr>
-          <p:cNvSpPr>
-            <a:spLocks xmlns:a="http://schemas.openxmlformats.org/drawingml/2006/main" noGrp="1"/>
-          </p:cNvSpPr>
-          <p:nvPr/>
-        </p:nvSpPr>
-        <p:spPr>
-          <a:xfrm xmlns:a="http://schemas.openxmlformats.org/drawingml/2006/main">
-            <a:off x="1000125" y="4514850"/>
-            <a:ext cx="476250" cy="476250"/>
-          </a:xfrm>
-          <a:prstGeom xmlns:a="http://schemas.openxmlformats.org/drawingml/2006/main" prst="ellipse">
+              <a:t>16,128 + 46,080</a:t>
+            </a:r>
+          </a:p>
+        </p:txBody>
+      </p:sp>
+      <p:sp>
+        <p:nvSpPr>
+          <p:cNvPr id="23" name="">
+            <a:extLst xmlns:a="http://schemas.openxmlformats.org/drawingml/2006/main">
+              <a:ext uri="{FF2B5EF4-FFF2-40B4-BE49-F238E27FC236}">
+                <a16:creationId xmlns:a16="http://schemas.microsoft.com/office/drawing/2014/main" id="{5ABA1231-FE3E-4650-B072-1435578F4D03}"/>
+              </a:ext>
+            </a:extLst>
+          </p:cNvPr>
+          <p:cNvSpPr>
+            <a:spLocks xmlns:a="http://schemas.openxmlformats.org/drawingml/2006/main" noGrp="1"/>
+          </p:cNvSpPr>
+          <p:nvPr/>
+        </p:nvSpPr>
+        <p:spPr>
+          <a:xfrm xmlns:a="http://schemas.openxmlformats.org/drawingml/2006/main">
+            <a:off x="1714500" y="4886325"/>
+            <a:ext cx="9334500" cy="9525"/>
+          </a:xfrm>
+          <a:prstGeom xmlns:a="http://schemas.openxmlformats.org/drawingml/2006/main" prst="rect">
             <a:avLst/>
           </a:prstGeom>
           <a:solidFill xmlns:a="http://schemas.openxmlformats.org/drawingml/2006/main">
-            <a:srgbClr val="2C6E73"/>
+            <a:srgbClr val="D9E0E6"/>
           </a:solidFill>
           <a:ln xmlns:a="http://schemas.openxmlformats.org/drawingml/2006/main" w="0">
-            <a:noFill/>
-          </a:ln>
-        </p:spPr>
-      </p:sp>
-      <p:sp>
-        <p:nvSpPr>
-          <p:cNvPr id="22" name="">
-            <a:extLst xmlns:a="http://schemas.openxmlformats.org/drawingml/2006/main">
-              <a:ext uri="{FF2B5EF4-FFF2-40B4-BE49-F238E27FC236}">
-                <a16:creationId xmlns:a16="http://schemas.microsoft.com/office/drawing/2014/main" id="{CB3532F4-61F6-4EFE-B8A4-B87EB90A5CD0}"/>
-              </a:ext>
-            </a:extLst>
-          </p:cNvPr>
-          <p:cNvSpPr>
-            <a:spLocks xmlns:a="http://schemas.openxmlformats.org/drawingml/2006/main" noGrp="1"/>
-          </p:cNvSpPr>
-          <p:nvPr/>
-        </p:nvSpPr>
-        <p:spPr>
-          <a:xfrm xmlns:a="http://schemas.openxmlformats.org/drawingml/2006/main">
-            <a:off x="1000125" y="4543425"/>
-            <a:ext cx="476250" cy="419100"/>
+            <a:solidFill>
+              <a:srgbClr val="D9E0E6"/>
+            </a:solidFill>
+          </a:ln>
+        </p:spPr>
+      </p:sp>
+      <p:sp>
+        <p:nvSpPr>
+          <p:cNvPr id="24" name="">
+            <a:extLst xmlns:a="http://schemas.openxmlformats.org/drawingml/2006/main">
+              <a:ext uri="{FF2B5EF4-FFF2-40B4-BE49-F238E27FC236}">
+                <a16:creationId xmlns:a16="http://schemas.microsoft.com/office/drawing/2014/main" id="{747B3BB0-D78A-4BD9-9ADF-F9D197E76720}"/>
+              </a:ext>
+            </a:extLst>
+          </p:cNvPr>
+          <p:cNvSpPr>
+            <a:spLocks xmlns:a="http://schemas.openxmlformats.org/drawingml/2006/main" noGrp="1"/>
+          </p:cNvSpPr>
+          <p:nvPr/>
+        </p:nvSpPr>
+        <p:spPr>
+          <a:xfrm xmlns:a="http://schemas.openxmlformats.org/drawingml/2006/main">
+            <a:off x="1162050" y="5019675"/>
+            <a:ext cx="400050" cy="400050"/>
           </a:xfrm>
           <a:prstGeom xmlns:a="http://schemas.openxmlformats.org/drawingml/2006/main" prst="rect">
             <a:avLst/>
@@ -8819,9 +8912,9 @@
           <a:lstStyle xmlns:a="http://schemas.openxmlformats.org/drawingml/2006/main"/>
           <a:p xmlns:a="http://schemas.openxmlformats.org/drawingml/2006/main">
             <a:pPr algn="ctr">
-              <a:defRPr sz="1350" b="1">
-                <a:solidFill>
-                  <a:srgbClr val="FFFFFF"/>
+              <a:defRPr sz="1125" b="1">
+                <a:solidFill>
+                  <a:srgbClr val="2F785D"/>
                 </a:solidFill>
                 <a:latin typeface="Arial"/>
                 <a:ea typeface="Arial"/>
@@ -8829,37 +8922,37 @@
               </a:defRPr>
             </a:pPr>
             <a:r>
-              <a:rPr sz="1350" b="1">
-                <a:solidFill>
-                  <a:srgbClr val="FFFFFF"/>
+              <a:rPr sz="1125" b="1">
+                <a:solidFill>
+                  <a:srgbClr val="2F785D"/>
                 </a:solidFill>
                 <a:latin typeface="Arial"/>
                 <a:ea typeface="Arial"/>
                 <a:cs typeface="Arial"/>
               </a:rPr>
-              <a:t>3</a:t>
-            </a:r>
-          </a:p>
-        </p:txBody>
-      </p:sp>
-      <p:sp>
-        <p:nvSpPr>
-          <p:cNvPr id="23" name="">
-            <a:extLst xmlns:a="http://schemas.openxmlformats.org/drawingml/2006/main">
-              <a:ext uri="{FF2B5EF4-FFF2-40B4-BE49-F238E27FC236}">
-                <a16:creationId xmlns:a16="http://schemas.microsoft.com/office/drawing/2014/main" id="{42BA35EB-4F78-42DE-B743-4BF408D61939}"/>
-              </a:ext>
-            </a:extLst>
-          </p:cNvPr>
-          <p:cNvSpPr>
-            <a:spLocks xmlns:a="http://schemas.openxmlformats.org/drawingml/2006/main" noGrp="1"/>
-          </p:cNvSpPr>
-          <p:nvPr/>
-        </p:nvSpPr>
-        <p:spPr>
-          <a:xfrm xmlns:a="http://schemas.openxmlformats.org/drawingml/2006/main">
-            <a:off x="1714500" y="4448175"/>
-            <a:ext cx="9429750" cy="609600"/>
+              <a:t>5</a:t>
+            </a:r>
+          </a:p>
+        </p:txBody>
+      </p:sp>
+      <p:sp>
+        <p:nvSpPr>
+          <p:cNvPr id="25" name="">
+            <a:extLst xmlns:a="http://schemas.openxmlformats.org/drawingml/2006/main">
+              <a:ext uri="{FF2B5EF4-FFF2-40B4-BE49-F238E27FC236}">
+                <a16:creationId xmlns:a16="http://schemas.microsoft.com/office/drawing/2014/main" id="{5BEE9620-3257-4D45-80C0-67D9AA95FC54}"/>
+              </a:ext>
+            </a:extLst>
+          </p:cNvPr>
+          <p:cNvSpPr>
+            <a:spLocks xmlns:a="http://schemas.openxmlformats.org/drawingml/2006/main" noGrp="1"/>
+          </p:cNvSpPr>
+          <p:nvPr/>
+        </p:nvSpPr>
+        <p:spPr>
+          <a:xfrm xmlns:a="http://schemas.openxmlformats.org/drawingml/2006/main">
+            <a:off x="1714500" y="4933950"/>
+            <a:ext cx="9525000" cy="638175"/>
           </a:xfrm>
           <a:prstGeom xmlns:a="http://schemas.openxmlformats.org/drawingml/2006/main" prst="rect">
             <a:avLst/>
@@ -8876,9 +8969,9 @@
           <a:lstStyle xmlns:a="http://schemas.openxmlformats.org/drawingml/2006/main"/>
           <a:p xmlns:a="http://schemas.openxmlformats.org/drawingml/2006/main">
             <a:pPr algn="l">
-              <a:defRPr sz="1500" b="0">
-                <a:solidFill>
-                  <a:srgbClr val="17253A"/>
+              <a:defRPr sz="1575" b="1">
+                <a:solidFill>
+                  <a:srgbClr val="2F785D"/>
                 </a:solidFill>
                 <a:latin typeface="Arial"/>
                 <a:ea typeface="Arial"/>
@@ -8886,159 +8979,15 @@
               </a:defRPr>
             </a:pPr>
             <a:r>
-              <a:rPr sz="1500" b="0">
-                <a:solidFill>
-                  <a:srgbClr val="17253A"/>
+              <a:rPr sz="1575" b="1">
+                <a:solidFill>
+                  <a:srgbClr val="2F785D"/>
                 </a:solidFill>
                 <a:latin typeface="Arial"/>
                 <a:ea typeface="Arial"/>
                 <a:cs typeface="Arial"/>
               </a:rPr>
-              <a:t>Multiply by 20: second partial product 46080.</a:t>
-            </a:r>
-          </a:p>
-        </p:txBody>
-      </p:sp>
-      <p:sp>
-        <p:nvSpPr>
-          <p:cNvPr id="24" name="">
-            <a:extLst xmlns:a="http://schemas.openxmlformats.org/drawingml/2006/main">
-              <a:ext uri="{FF2B5EF4-FFF2-40B4-BE49-F238E27FC236}">
-                <a16:creationId xmlns:a16="http://schemas.microsoft.com/office/drawing/2014/main" id="{F78FB215-FD8C-4061-98A6-CDA3C11AA5EC}"/>
-              </a:ext>
-            </a:extLst>
-          </p:cNvPr>
-          <p:cNvSpPr>
-            <a:spLocks xmlns:a="http://schemas.openxmlformats.org/drawingml/2006/main" noGrp="1"/>
-          </p:cNvSpPr>
-          <p:nvPr/>
-        </p:nvSpPr>
-        <p:spPr>
-          <a:xfrm xmlns:a="http://schemas.openxmlformats.org/drawingml/2006/main">
-            <a:off x="1000125" y="5257800"/>
-            <a:ext cx="476250" cy="476250"/>
-          </a:xfrm>
-          <a:prstGeom xmlns:a="http://schemas.openxmlformats.org/drawingml/2006/main" prst="ellipse">
-            <a:avLst/>
-          </a:prstGeom>
-          <a:solidFill xmlns:a="http://schemas.openxmlformats.org/drawingml/2006/main">
-            <a:srgbClr val="2C6E73"/>
-          </a:solidFill>
-          <a:ln xmlns:a="http://schemas.openxmlformats.org/drawingml/2006/main" w="0">
-            <a:noFill/>
-          </a:ln>
-        </p:spPr>
-      </p:sp>
-      <p:sp>
-        <p:nvSpPr>
-          <p:cNvPr id="25" name="">
-            <a:extLst xmlns:a="http://schemas.openxmlformats.org/drawingml/2006/main">
-              <a:ext uri="{FF2B5EF4-FFF2-40B4-BE49-F238E27FC236}">
-                <a16:creationId xmlns:a16="http://schemas.microsoft.com/office/drawing/2014/main" id="{F0614FE5-A7B3-47E1-A99D-82A84CA98F27}"/>
-              </a:ext>
-            </a:extLst>
-          </p:cNvPr>
-          <p:cNvSpPr>
-            <a:spLocks xmlns:a="http://schemas.openxmlformats.org/drawingml/2006/main" noGrp="1"/>
-          </p:cNvSpPr>
-          <p:nvPr/>
-        </p:nvSpPr>
-        <p:spPr>
-          <a:xfrm xmlns:a="http://schemas.openxmlformats.org/drawingml/2006/main">
-            <a:off x="1000125" y="5286375"/>
-            <a:ext cx="476250" cy="419100"/>
-          </a:xfrm>
-          <a:prstGeom xmlns:a="http://schemas.openxmlformats.org/drawingml/2006/main" prst="rect">
-            <a:avLst/>
-          </a:prstGeom>
-          <a:noFill xmlns:a="http://schemas.openxmlformats.org/drawingml/2006/main"/>
-          <a:ln xmlns:a="http://schemas.openxmlformats.org/drawingml/2006/main" w="0">
-            <a:noFill/>
-          </a:ln>
-        </p:spPr>
-        <p:txBody>
-          <a:bodyPr xmlns:a="http://schemas.openxmlformats.org/drawingml/2006/main" anchor="ctr">
-            <a:normAutofit fontScale="100000"/>
-          </a:bodyPr>
-          <a:lstStyle xmlns:a="http://schemas.openxmlformats.org/drawingml/2006/main"/>
-          <a:p xmlns:a="http://schemas.openxmlformats.org/drawingml/2006/main">
-            <a:pPr algn="ctr">
-              <a:defRPr sz="1350" b="1">
-                <a:solidFill>
-                  <a:srgbClr val="FFFFFF"/>
-                </a:solidFill>
-                <a:latin typeface="Arial"/>
-                <a:ea typeface="Arial"/>
-                <a:cs typeface="Arial"/>
-              </a:defRPr>
-            </a:pPr>
-            <a:r>
-              <a:rPr sz="1350" b="1">
-                <a:solidFill>
-                  <a:srgbClr val="FFFFFF"/>
-                </a:solidFill>
-                <a:latin typeface="Arial"/>
-                <a:ea typeface="Arial"/>
-                <a:cs typeface="Arial"/>
-              </a:rPr>
-              <a:t>4</a:t>
-            </a:r>
-          </a:p>
-        </p:txBody>
-      </p:sp>
-      <p:sp>
-        <p:nvSpPr>
-          <p:cNvPr id="26" name="">
-            <a:extLst xmlns:a="http://schemas.openxmlformats.org/drawingml/2006/main">
-              <a:ext uri="{FF2B5EF4-FFF2-40B4-BE49-F238E27FC236}">
-                <a16:creationId xmlns:a16="http://schemas.microsoft.com/office/drawing/2014/main" id="{2BAED7A3-C841-4AF8-9BE9-F9CCA36C0EC3}"/>
-              </a:ext>
-            </a:extLst>
-          </p:cNvPr>
-          <p:cNvSpPr>
-            <a:spLocks xmlns:a="http://schemas.openxmlformats.org/drawingml/2006/main" noGrp="1"/>
-          </p:cNvSpPr>
-          <p:nvPr/>
-        </p:nvSpPr>
-        <p:spPr>
-          <a:xfrm xmlns:a="http://schemas.openxmlformats.org/drawingml/2006/main">
-            <a:off x="1714500" y="5191125"/>
-            <a:ext cx="9429750" cy="609600"/>
-          </a:xfrm>
-          <a:prstGeom xmlns:a="http://schemas.openxmlformats.org/drawingml/2006/main" prst="rect">
-            <a:avLst/>
-          </a:prstGeom>
-          <a:noFill xmlns:a="http://schemas.openxmlformats.org/drawingml/2006/main"/>
-          <a:ln xmlns:a="http://schemas.openxmlformats.org/drawingml/2006/main" w="0">
-            <a:noFill/>
-          </a:ln>
-        </p:spPr>
-        <p:txBody>
-          <a:bodyPr xmlns:a="http://schemas.openxmlformats.org/drawingml/2006/main" anchor="ctr">
-            <a:normAutofit fontScale="100000"/>
-          </a:bodyPr>
-          <a:lstStyle xmlns:a="http://schemas.openxmlformats.org/drawingml/2006/main"/>
-          <a:p xmlns:a="http://schemas.openxmlformats.org/drawingml/2006/main">
-            <a:pPr algn="l">
-              <a:defRPr sz="1500" b="1">
-                <a:solidFill>
-                  <a:srgbClr val="2F785D"/>
-                </a:solidFill>
-                <a:latin typeface="Arial"/>
-                <a:ea typeface="Arial"/>
-                <a:cs typeface="Arial"/>
-              </a:defRPr>
-            </a:pPr>
-            <a:r>
-              <a:rPr sz="1500" b="1">
-                <a:solidFill>
-                  <a:srgbClr val="2F785D"/>
-                </a:solidFill>
-                <a:latin typeface="Arial"/>
-                <a:ea typeface="Arial"/>
-                <a:cs typeface="Arial"/>
-              </a:rPr>
-              <a:t>Add the partial products: 16128 + 46080 = 62208.</a:t>
+              <a:t>62,208</a:t>
             </a:r>
           </a:p>
         </p:txBody>
@@ -9046,7 +8995,7 @@
     </p:spTree>
     <p:extLst>
       <p:ext uri="{BB962C8B-B14F-4D97-AF65-F5344CB8AC3E}">
-        <p14:creationId xmlns:p14="http://schemas.microsoft.com/office/powerpoint/2010/main" val="1719993881"/>
+        <p14:creationId xmlns:p14="http://schemas.microsoft.com/office/powerpoint/2010/main" val="1739220918"/>
       </p:ext>
     </p:extLst>
   </p:cSld>
@@ -9129,7 +9078,7 @@
                                           </p:stCondLst>
                                         </p:cTn>
                                         <p:tgtEl>
-                                          <p:spTgt spid="12"/>
+                                          <p:spTgt spid="13"/>
                                         </p:tgtEl>
                                         <p:attrNameLst>
                                           <p:attrName>style.visibility</p:attrName>
@@ -9174,7 +9123,7 @@
                                           </p:stCondLst>
                                         </p:cTn>
                                         <p:tgtEl>
-                                          <p:spTgt spid="13"/>
+                                          <p:spTgt spid="16"/>
                                         </p:tgtEl>
                                         <p:attrNameLst>
                                           <p:attrName>style.visibility</p:attrName>
@@ -9219,7 +9168,7 @@
                                           </p:stCondLst>
                                         </p:cTn>
                                         <p:tgtEl>
-                                          <p:spTgt spid="14"/>
+                                          <p:spTgt spid="19"/>
                                         </p:tgtEl>
                                         <p:attrNameLst>
                                           <p:attrName>style.visibility</p:attrName>
@@ -9264,7 +9213,7 @@
                                           </p:stCondLst>
                                         </p:cTn>
                                         <p:tgtEl>
-                                          <p:spTgt spid="17"/>
+                                          <p:spTgt spid="22"/>
                                         </p:tgtEl>
                                         <p:attrNameLst>
                                           <p:attrName>style.visibility</p:attrName>
@@ -9309,97 +9258,7 @@
                                           </p:stCondLst>
                                         </p:cTn>
                                         <p:tgtEl>
-                                          <p:spTgt spid="20"/>
-                                        </p:tgtEl>
-                                        <p:attrNameLst>
-                                          <p:attrName>style.visibility</p:attrName>
-                                        </p:attrNameLst>
-                                      </p:cBhvr>
-                                      <p:to>
-                                        <p:strVal val="visible"/>
-                                      </p:to>
-                                    </p:set>
-                                  </p:childTnLst>
-                                </p:cTn>
-                              </p:par>
-                            </p:childTnLst>
-                          </p:cTn>
-                        </p:par>
-                      </p:childTnLst>
-                    </p:cTn>
-                  </p:par>
-                  <p:par>
-                    <p:cTn id="27" fill="hold">
-                      <p:stCondLst>
-                        <p:cond delay="indefinite"/>
-                      </p:stCondLst>
-                      <p:childTnLst>
-                        <p:par>
-                          <p:cTn id="28" fill="hold">
-                            <p:stCondLst>
-                              <p:cond delay="0"/>
-                            </p:stCondLst>
-                            <p:childTnLst>
-                              <p:par>
-                                <p:cTn id="29" presetID="1" presetClass="entr" presetSubtype="0" fill="hold" grpId="0" nodeType="clickEffect">
-                                  <p:stCondLst>
-                                    <p:cond delay="0"/>
-                                  </p:stCondLst>
-                                  <p:childTnLst>
-                                    <p:set>
-                                      <p:cBhvr>
-                                        <p:cTn id="30" dur="1" fill="hold">
-                                          <p:stCondLst>
-                                            <p:cond delay="0"/>
-                                          </p:stCondLst>
-                                        </p:cTn>
-                                        <p:tgtEl>
-                                          <p:spTgt spid="23"/>
-                                        </p:tgtEl>
-                                        <p:attrNameLst>
-                                          <p:attrName>style.visibility</p:attrName>
-                                        </p:attrNameLst>
-                                      </p:cBhvr>
-                                      <p:to>
-                                        <p:strVal val="visible"/>
-                                      </p:to>
-                                    </p:set>
-                                  </p:childTnLst>
-                                </p:cTn>
-                              </p:par>
-                            </p:childTnLst>
-                          </p:cTn>
-                        </p:par>
-                      </p:childTnLst>
-                    </p:cTn>
-                  </p:par>
-                  <p:par>
-                    <p:cTn id="31" fill="hold">
-                      <p:stCondLst>
-                        <p:cond delay="indefinite"/>
-                      </p:stCondLst>
-                      <p:childTnLst>
-                        <p:par>
-                          <p:cTn id="32" fill="hold">
-                            <p:stCondLst>
-                              <p:cond delay="0"/>
-                            </p:stCondLst>
-                            <p:childTnLst>
-                              <p:par>
-                                <p:cTn id="33" presetID="1" presetClass="entr" presetSubtype="0" fill="hold" grpId="0" nodeType="clickEffect">
-                                  <p:stCondLst>
-                                    <p:cond delay="0"/>
-                                  </p:stCondLst>
-                                  <p:childTnLst>
-                                    <p:set>
-                                      <p:cBhvr>
-                                        <p:cTn id="34" dur="1" fill="hold">
-                                          <p:stCondLst>
-                                            <p:cond delay="0"/>
-                                          </p:stCondLst>
-                                        </p:cTn>
-                                        <p:tgtEl>
-                                          <p:spTgt spid="26"/>
+                                          <p:spTgt spid="25"/>
                                         </p:tgtEl>
                                         <p:attrNameLst>
                                           <p:attrName>style.visibility</p:attrName>
@@ -9441,13 +9300,11 @@
     </p:tnLst>
     <p:bldLst>
       <p:bldP spid="10" grpId="0"/>
-      <p:bldP spid="12" grpId="0"/>
       <p:bldP spid="13" grpId="0"/>
-      <p:bldP spid="14" grpId="0"/>
-      <p:bldP spid="17" grpId="0"/>
-      <p:bldP spid="20" grpId="0"/>
-      <p:bldP spid="23" grpId="0"/>
-      <p:bldP spid="26" grpId="0"/>
+      <p:bldP spid="16" grpId="0"/>
+      <p:bldP spid="19" grpId="0"/>
+      <p:bldP spid="22" grpId="0"/>
+      <p:bldP spid="25" grpId="0"/>
     </p:bldLst>
   </p:timing>
 </p:sld>
@@ -9477,7 +9334,7 @@
           <p:cNvPr id="15" name="">
             <a:extLst xmlns:a="http://schemas.openxmlformats.org/drawingml/2006/main">
               <a:ext uri="{FF2B5EF4-FFF2-40B4-BE49-F238E27FC236}">
-                <a16:creationId xmlns:a16="http://schemas.microsoft.com/office/drawing/2014/main" id="{356DF46E-F5B5-4726-AA19-683D3FADA818}"/>
+                <a16:creationId xmlns:a16="http://schemas.microsoft.com/office/drawing/2014/main" id="{0A39D2B4-3B68-46E0-82A1-7895DC254CDC}"/>
               </a:ext>
             </a:extLst>
           </p:cNvPr>
@@ -9509,7 +9366,7 @@
           <p:cNvPr id="2" name="">
             <a:extLst xmlns:a="http://schemas.openxmlformats.org/drawingml/2006/main">
               <a:ext uri="{FF2B5EF4-FFF2-40B4-BE49-F238E27FC236}">
-                <a16:creationId xmlns:a16="http://schemas.microsoft.com/office/drawing/2014/main" id="{61B3AFBA-7EC5-4B68-9243-2AEBE7E7D5EB}"/>
+                <a16:creationId xmlns:a16="http://schemas.microsoft.com/office/drawing/2014/main" id="{FBF50E19-CA84-49A9-896D-572E5A01F264}"/>
               </a:ext>
             </a:extLst>
           </p:cNvPr>
@@ -9566,7 +9423,7 @@
           <p:cNvPr id="3" name="">
             <a:extLst xmlns:a="http://schemas.openxmlformats.org/drawingml/2006/main">
               <a:ext uri="{FF2B5EF4-FFF2-40B4-BE49-F238E27FC236}">
-                <a16:creationId xmlns:a16="http://schemas.microsoft.com/office/drawing/2014/main" id="{CD594333-1893-448B-94A4-64560501CC25}"/>
+                <a16:creationId xmlns:a16="http://schemas.microsoft.com/office/drawing/2014/main" id="{A1FD0156-B6D5-4F3E-B6A9-7CA31D24618C}"/>
               </a:ext>
             </a:extLst>
           </p:cNvPr>
@@ -9598,7 +9455,7 @@
           <p:cNvPr id="4" name="">
             <a:extLst xmlns:a="http://schemas.openxmlformats.org/drawingml/2006/main">
               <a:ext uri="{FF2B5EF4-FFF2-40B4-BE49-F238E27FC236}">
-                <a16:creationId xmlns:a16="http://schemas.microsoft.com/office/drawing/2014/main" id="{B48C2C28-EE26-4C24-9382-E78C02385797}"/>
+                <a16:creationId xmlns:a16="http://schemas.microsoft.com/office/drawing/2014/main" id="{F74BF873-CB63-405D-8AA4-CF78F9B6D0CD}"/>
               </a:ext>
             </a:extLst>
           </p:cNvPr>
@@ -9655,7 +9512,7 @@
           <p:cNvPr id="5" name="">
             <a:extLst xmlns:a="http://schemas.openxmlformats.org/drawingml/2006/main">
               <a:ext uri="{FF2B5EF4-FFF2-40B4-BE49-F238E27FC236}">
-                <a16:creationId xmlns:a16="http://schemas.microsoft.com/office/drawing/2014/main" id="{B5E35778-F537-4DD7-BBCB-B3D31675C43F}"/>
+                <a16:creationId xmlns:a16="http://schemas.microsoft.com/office/drawing/2014/main" id="{6EA18867-9B2C-4BF4-8394-1FA9D6BCF195}"/>
               </a:ext>
             </a:extLst>
           </p:cNvPr>
@@ -9712,7 +9569,7 @@
           <p:cNvPr id="6" name="">
             <a:extLst xmlns:a="http://schemas.openxmlformats.org/drawingml/2006/main">
               <a:ext uri="{FF2B5EF4-FFF2-40B4-BE49-F238E27FC236}">
-                <a16:creationId xmlns:a16="http://schemas.microsoft.com/office/drawing/2014/main" id="{8089678E-EAA4-4169-B2A2-50D9E3A645EC}"/>
+                <a16:creationId xmlns:a16="http://schemas.microsoft.com/office/drawing/2014/main" id="{F5E25F9C-BD7F-4380-A788-7692976A2F5F}"/>
               </a:ext>
             </a:extLst>
           </p:cNvPr>
@@ -9769,7 +9626,7 @@
           <p:cNvPr id="7" name="">
             <a:extLst xmlns:a="http://schemas.openxmlformats.org/drawingml/2006/main">
               <a:ext uri="{FF2B5EF4-FFF2-40B4-BE49-F238E27FC236}">
-                <a16:creationId xmlns:a16="http://schemas.microsoft.com/office/drawing/2014/main" id="{358470EC-864F-4296-9F9F-FBCCD95E9863}"/>
+                <a16:creationId xmlns:a16="http://schemas.microsoft.com/office/drawing/2014/main" id="{C62C55E8-BE26-4FA7-B8E6-BF676630A680}"/>
               </a:ext>
             </a:extLst>
           </p:cNvPr>
@@ -9801,7 +9658,7 @@
           <p:cNvPr id="8" name="">
             <a:extLst xmlns:a="http://schemas.openxmlformats.org/drawingml/2006/main">
               <a:ext uri="{FF2B5EF4-FFF2-40B4-BE49-F238E27FC236}">
-                <a16:creationId xmlns:a16="http://schemas.microsoft.com/office/drawing/2014/main" id="{35179D37-62B5-4A99-930F-F657001A7D9A}"/>
+                <a16:creationId xmlns:a16="http://schemas.microsoft.com/office/drawing/2014/main" id="{6F995054-9251-4E9C-8812-8B9839CD8A57}"/>
               </a:ext>
             </a:extLst>
           </p:cNvPr>
@@ -9858,7 +9715,7 @@
           <p:cNvPr id="9" name="">
             <a:extLst xmlns:a="http://schemas.openxmlformats.org/drawingml/2006/main">
               <a:ext uri="{FF2B5EF4-FFF2-40B4-BE49-F238E27FC236}">
-                <a16:creationId xmlns:a16="http://schemas.microsoft.com/office/drawing/2014/main" id="{C34371E8-86BC-45D8-ADDD-21BE723BC625}"/>
+                <a16:creationId xmlns:a16="http://schemas.microsoft.com/office/drawing/2014/main" id="{DB42FACA-FE1C-4067-B805-BBD27CF29218}"/>
               </a:ext>
             </a:extLst>
           </p:cNvPr>
@@ -9915,7 +9772,7 @@
           <p:cNvPr id="10" name="">
             <a:extLst xmlns:a="http://schemas.openxmlformats.org/drawingml/2006/main">
               <a:ext uri="{FF2B5EF4-FFF2-40B4-BE49-F238E27FC236}">
-                <a16:creationId xmlns:a16="http://schemas.microsoft.com/office/drawing/2014/main" id="{0BAB5877-AEDE-49AB-8119-26397DE32D80}"/>
+                <a16:creationId xmlns:a16="http://schemas.microsoft.com/office/drawing/2014/main" id="{14446013-D97A-4E6E-AE5D-85ABBA086A36}"/>
               </a:ext>
             </a:extLst>
           </p:cNvPr>
@@ -9972,7 +9829,7 @@
           <p:cNvPr id="11" name="">
             <a:extLst xmlns:a="http://schemas.openxmlformats.org/drawingml/2006/main">
               <a:ext uri="{FF2B5EF4-FFF2-40B4-BE49-F238E27FC236}">
-                <a16:creationId xmlns:a16="http://schemas.microsoft.com/office/drawing/2014/main" id="{EDA5CA30-4D03-4917-B5B6-5EA05BABED05}"/>
+                <a16:creationId xmlns:a16="http://schemas.microsoft.com/office/drawing/2014/main" id="{2F7BB455-0C78-4543-8B76-2FD46FF55A37}"/>
               </a:ext>
             </a:extLst>
           </p:cNvPr>
@@ -10029,7 +9886,7 @@
           <p:cNvPr id="12" name="">
             <a:extLst xmlns:a="http://schemas.openxmlformats.org/drawingml/2006/main">
               <a:ext uri="{FF2B5EF4-FFF2-40B4-BE49-F238E27FC236}">
-                <a16:creationId xmlns:a16="http://schemas.microsoft.com/office/drawing/2014/main" id="{FB961AEB-0497-4D63-8BC9-4E010F3596E2}"/>
+                <a16:creationId xmlns:a16="http://schemas.microsoft.com/office/drawing/2014/main" id="{64D08247-9A47-49FB-B8C7-503B35E78FDA}"/>
               </a:ext>
             </a:extLst>
           </p:cNvPr>
@@ -10061,7 +9918,7 @@
           <p:cNvPr id="13" name="">
             <a:extLst xmlns:a="http://schemas.openxmlformats.org/drawingml/2006/main">
               <a:ext uri="{FF2B5EF4-FFF2-40B4-BE49-F238E27FC236}">
-                <a16:creationId xmlns:a16="http://schemas.microsoft.com/office/drawing/2014/main" id="{278E4940-D90D-42C4-899F-9488602DBE6B}"/>
+                <a16:creationId xmlns:a16="http://schemas.microsoft.com/office/drawing/2014/main" id="{491A128F-E014-4ED4-A264-73708DEF26B1}"/>
               </a:ext>
             </a:extLst>
           </p:cNvPr>
@@ -10118,7 +9975,7 @@
           <p:cNvPr id="14" name="">
             <a:extLst xmlns:a="http://schemas.openxmlformats.org/drawingml/2006/main">
               <a:ext uri="{FF2B5EF4-FFF2-40B4-BE49-F238E27FC236}">
-                <a16:creationId xmlns:a16="http://schemas.microsoft.com/office/drawing/2014/main" id="{BA35497D-735D-4BBC-A632-629B876EE554}"/>
+                <a16:creationId xmlns:a16="http://schemas.microsoft.com/office/drawing/2014/main" id="{10ABC9AD-1E41-4777-9080-74A46D699F66}"/>
               </a:ext>
             </a:extLst>
           </p:cNvPr>
@@ -10173,7 +10030,7 @@
     </p:spTree>
     <p:extLst>
       <p:ext uri="{BB962C8B-B14F-4D97-AF65-F5344CB8AC3E}">
-        <p14:creationId xmlns:p14="http://schemas.microsoft.com/office/powerpoint/2010/main" val="458043034"/>
+        <p14:creationId xmlns:p14="http://schemas.microsoft.com/office/powerpoint/2010/main" val="811190610"/>
       </p:ext>
     </p:extLst>
   </p:cSld>
@@ -10374,7 +10231,7 @@
           <p:cNvPr id="16" name="">
             <a:extLst xmlns:a="http://schemas.openxmlformats.org/drawingml/2006/main">
               <a:ext uri="{FF2B5EF4-FFF2-40B4-BE49-F238E27FC236}">
-                <a16:creationId xmlns:a16="http://schemas.microsoft.com/office/drawing/2014/main" id="{91CD1528-ABA5-419A-B3D3-FCD194E452A5}"/>
+                <a16:creationId xmlns:a16="http://schemas.microsoft.com/office/drawing/2014/main" id="{09686980-9431-4617-BF45-F4D333E0A0B3}"/>
               </a:ext>
             </a:extLst>
           </p:cNvPr>
@@ -10406,7 +10263,7 @@
           <p:cNvPr id="2" name="">
             <a:extLst xmlns:a="http://schemas.openxmlformats.org/drawingml/2006/main">
               <a:ext uri="{FF2B5EF4-FFF2-40B4-BE49-F238E27FC236}">
-                <a16:creationId xmlns:a16="http://schemas.microsoft.com/office/drawing/2014/main" id="{71D3C1D8-9D60-46E3-ADC2-AAFFEE008C24}"/>
+                <a16:creationId xmlns:a16="http://schemas.microsoft.com/office/drawing/2014/main" id="{B875A342-32C9-485E-B23C-F2DA86C73336}"/>
               </a:ext>
             </a:extLst>
           </p:cNvPr>
@@ -10463,7 +10320,7 @@
           <p:cNvPr id="3" name="">
             <a:extLst xmlns:a="http://schemas.openxmlformats.org/drawingml/2006/main">
               <a:ext uri="{FF2B5EF4-FFF2-40B4-BE49-F238E27FC236}">
-                <a16:creationId xmlns:a16="http://schemas.microsoft.com/office/drawing/2014/main" id="{D43F3DA4-3BA6-4497-8083-AD07E3374722}"/>
+                <a16:creationId xmlns:a16="http://schemas.microsoft.com/office/drawing/2014/main" id="{B19DDD0B-BD41-4567-9AC1-B0236CDF1840}"/>
               </a:ext>
             </a:extLst>
           </p:cNvPr>
@@ -10495,7 +10352,7 @@
           <p:cNvPr id="4" name="">
             <a:extLst xmlns:a="http://schemas.openxmlformats.org/drawingml/2006/main">
               <a:ext uri="{FF2B5EF4-FFF2-40B4-BE49-F238E27FC236}">
-                <a16:creationId xmlns:a16="http://schemas.microsoft.com/office/drawing/2014/main" id="{2AF86CD6-5C0A-4C0C-A167-B1D1FD8A6C26}"/>
+                <a16:creationId xmlns:a16="http://schemas.microsoft.com/office/drawing/2014/main" id="{57BA1A4E-64C7-45BA-89BE-66B7463E9B18}"/>
               </a:ext>
             </a:extLst>
           </p:cNvPr>
@@ -10552,7 +10409,7 @@
           <p:cNvPr id="5" name="">
             <a:extLst xmlns:a="http://schemas.openxmlformats.org/drawingml/2006/main">
               <a:ext uri="{FF2B5EF4-FFF2-40B4-BE49-F238E27FC236}">
-                <a16:creationId xmlns:a16="http://schemas.microsoft.com/office/drawing/2014/main" id="{C26EB430-82BD-450D-8EDD-ECA65CE4556C}"/>
+                <a16:creationId xmlns:a16="http://schemas.microsoft.com/office/drawing/2014/main" id="{B735675E-9285-4CEF-A77B-FD974B59C5C7}"/>
               </a:ext>
             </a:extLst>
           </p:cNvPr>
@@ -10609,7 +10466,7 @@
           <p:cNvPr id="6" name="">
             <a:extLst xmlns:a="http://schemas.openxmlformats.org/drawingml/2006/main">
               <a:ext uri="{FF2B5EF4-FFF2-40B4-BE49-F238E27FC236}">
-                <a16:creationId xmlns:a16="http://schemas.microsoft.com/office/drawing/2014/main" id="{DCCEF121-1926-435B-8457-64AA404E5A14}"/>
+                <a16:creationId xmlns:a16="http://schemas.microsoft.com/office/drawing/2014/main" id="{EC538855-766C-43DE-8C90-033687CC3ED8}"/>
               </a:ext>
             </a:extLst>
           </p:cNvPr>
@@ -10666,7 +10523,7 @@
           <p:cNvPr id="7" name="">
             <a:extLst xmlns:a="http://schemas.openxmlformats.org/drawingml/2006/main">
               <a:ext uri="{FF2B5EF4-FFF2-40B4-BE49-F238E27FC236}">
-                <a16:creationId xmlns:a16="http://schemas.microsoft.com/office/drawing/2014/main" id="{FCF115A3-B384-49F6-B82D-CA05231D066B}"/>
+                <a16:creationId xmlns:a16="http://schemas.microsoft.com/office/drawing/2014/main" id="{004548A0-1CB3-4377-AD98-FCA664102C70}"/>
               </a:ext>
             </a:extLst>
           </p:cNvPr>
@@ -10698,7 +10555,7 @@
           <p:cNvPr id="8" name="">
             <a:extLst xmlns:a="http://schemas.openxmlformats.org/drawingml/2006/main">
               <a:ext uri="{FF2B5EF4-FFF2-40B4-BE49-F238E27FC236}">
-                <a16:creationId xmlns:a16="http://schemas.microsoft.com/office/drawing/2014/main" id="{87191D67-0DC0-4BC1-86E6-CEB379410C8E}"/>
+                <a16:creationId xmlns:a16="http://schemas.microsoft.com/office/drawing/2014/main" id="{A8E3BE9D-FBB6-47A9-9624-1867564D732A}"/>
               </a:ext>
             </a:extLst>
           </p:cNvPr>
@@ -10755,7 +10612,7 @@
           <p:cNvPr id="9" name="">
             <a:extLst xmlns:a="http://schemas.openxmlformats.org/drawingml/2006/main">
               <a:ext uri="{FF2B5EF4-FFF2-40B4-BE49-F238E27FC236}">
-                <a16:creationId xmlns:a16="http://schemas.microsoft.com/office/drawing/2014/main" id="{D17B0E78-AD27-4147-B3FD-F049FB275528}"/>
+                <a16:creationId xmlns:a16="http://schemas.microsoft.com/office/drawing/2014/main" id="{A7CF1149-A740-494F-B0C0-BF78E455938E}"/>
               </a:ext>
             </a:extLst>
           </p:cNvPr>
@@ -10812,7 +10669,7 @@
           <p:cNvPr id="10" name="">
             <a:extLst xmlns:a="http://schemas.openxmlformats.org/drawingml/2006/main">
               <a:ext uri="{FF2B5EF4-FFF2-40B4-BE49-F238E27FC236}">
-                <a16:creationId xmlns:a16="http://schemas.microsoft.com/office/drawing/2014/main" id="{FCD43C24-6F50-4975-9F92-D5474EFD8445}"/>
+                <a16:creationId xmlns:a16="http://schemas.microsoft.com/office/drawing/2014/main" id="{A8B42E5D-F576-4C8D-905C-06AEEBCD4AB1}"/>
               </a:ext>
             </a:extLst>
           </p:cNvPr>
@@ -10869,7 +10726,7 @@
           <p:cNvPr id="11" name="">
             <a:extLst xmlns:a="http://schemas.openxmlformats.org/drawingml/2006/main">
               <a:ext uri="{FF2B5EF4-FFF2-40B4-BE49-F238E27FC236}">
-                <a16:creationId xmlns:a16="http://schemas.microsoft.com/office/drawing/2014/main" id="{365D9969-A8EC-4B52-B698-55228EF5E773}"/>
+                <a16:creationId xmlns:a16="http://schemas.microsoft.com/office/drawing/2014/main" id="{FC768F41-285E-4C2E-B0E8-4595BB5548EF}"/>
               </a:ext>
             </a:extLst>
           </p:cNvPr>
@@ -10926,7 +10783,7 @@
           <p:cNvPr id="12" name="">
             <a:extLst xmlns:a="http://schemas.openxmlformats.org/drawingml/2006/main">
               <a:ext uri="{FF2B5EF4-FFF2-40B4-BE49-F238E27FC236}">
-                <a16:creationId xmlns:a16="http://schemas.microsoft.com/office/drawing/2014/main" id="{CBB7FD83-1B3B-4DC9-B71D-9B7E9D30E2B2}"/>
+                <a16:creationId xmlns:a16="http://schemas.microsoft.com/office/drawing/2014/main" id="{515E480A-B3D9-41FF-9E8A-32EF5C160532}"/>
               </a:ext>
             </a:extLst>
           </p:cNvPr>
@@ -10983,7 +10840,7 @@
           <p:cNvPr id="13" name="">
             <a:extLst xmlns:a="http://schemas.openxmlformats.org/drawingml/2006/main">
               <a:ext uri="{FF2B5EF4-FFF2-40B4-BE49-F238E27FC236}">
-                <a16:creationId xmlns:a16="http://schemas.microsoft.com/office/drawing/2014/main" id="{AA4860F9-B5E4-4814-8FAB-2F3816ADF191}"/>
+                <a16:creationId xmlns:a16="http://schemas.microsoft.com/office/drawing/2014/main" id="{55388435-282C-48FA-8DE5-EA4F1474FB69}"/>
               </a:ext>
             </a:extLst>
           </p:cNvPr>
@@ -11040,7 +10897,7 @@
           <p:cNvPr id="14" name="">
             <a:extLst xmlns:a="http://schemas.openxmlformats.org/drawingml/2006/main">
               <a:ext uri="{FF2B5EF4-FFF2-40B4-BE49-F238E27FC236}">
-                <a16:creationId xmlns:a16="http://schemas.microsoft.com/office/drawing/2014/main" id="{4F2C0CF9-A1D8-4EC5-AA1A-E9406DE2B771}"/>
+                <a16:creationId xmlns:a16="http://schemas.microsoft.com/office/drawing/2014/main" id="{C823C14E-E0D2-4DAA-BC01-529C75D3CB6D}"/>
               </a:ext>
             </a:extLst>
           </p:cNvPr>
@@ -11097,7 +10954,7 @@
           <p:cNvPr id="15" name="">
             <a:extLst xmlns:a="http://schemas.openxmlformats.org/drawingml/2006/main">
               <a:ext uri="{FF2B5EF4-FFF2-40B4-BE49-F238E27FC236}">
-                <a16:creationId xmlns:a16="http://schemas.microsoft.com/office/drawing/2014/main" id="{C3DDA3D0-1FDB-434E-BB9D-854EB89187C2}"/>
+                <a16:creationId xmlns:a16="http://schemas.microsoft.com/office/drawing/2014/main" id="{4490DC01-3304-41A7-B838-7407905D5EAA}"/>
               </a:ext>
             </a:extLst>
           </p:cNvPr>
@@ -11152,7 +11009,7 @@
     </p:spTree>
     <p:extLst>
       <p:ext uri="{BB962C8B-B14F-4D97-AF65-F5344CB8AC3E}">
-        <p14:creationId xmlns:p14="http://schemas.microsoft.com/office/powerpoint/2010/main" val="1461187157"/>
+        <p14:creationId xmlns:p14="http://schemas.microsoft.com/office/powerpoint/2010/main" val="1905316939"/>
       </p:ext>
     </p:extLst>
   </p:cSld>
@@ -11307,7 +11164,7 @@
           <p:cNvPr id="16" name="">
             <a:extLst xmlns:a="http://schemas.openxmlformats.org/drawingml/2006/main">
               <a:ext uri="{FF2B5EF4-FFF2-40B4-BE49-F238E27FC236}">
-                <a16:creationId xmlns:a16="http://schemas.microsoft.com/office/drawing/2014/main" id="{2706B2CD-C85D-4252-8083-D2C7C96CB442}"/>
+                <a16:creationId xmlns:a16="http://schemas.microsoft.com/office/drawing/2014/main" id="{EB0C4ED4-4C5D-4288-B54B-6DEBDC3755DE}"/>
               </a:ext>
             </a:extLst>
           </p:cNvPr>
@@ -11339,7 +11196,7 @@
           <p:cNvPr id="2" name="">
             <a:extLst xmlns:a="http://schemas.openxmlformats.org/drawingml/2006/main">
               <a:ext uri="{FF2B5EF4-FFF2-40B4-BE49-F238E27FC236}">
-                <a16:creationId xmlns:a16="http://schemas.microsoft.com/office/drawing/2014/main" id="{2A88813F-4A69-45C5-93CA-8A002014EF15}"/>
+                <a16:creationId xmlns:a16="http://schemas.microsoft.com/office/drawing/2014/main" id="{7AC82EE2-9045-498B-ADCE-7D50682DD93B}"/>
               </a:ext>
             </a:extLst>
           </p:cNvPr>
@@ -11396,7 +11253,7 @@
           <p:cNvPr id="3" name="">
             <a:extLst xmlns:a="http://schemas.openxmlformats.org/drawingml/2006/main">
               <a:ext uri="{FF2B5EF4-FFF2-40B4-BE49-F238E27FC236}">
-                <a16:creationId xmlns:a16="http://schemas.microsoft.com/office/drawing/2014/main" id="{29978DFE-A98B-44C9-B805-DD593907F71F}"/>
+                <a16:creationId xmlns:a16="http://schemas.microsoft.com/office/drawing/2014/main" id="{F2262347-1F69-4596-90E4-ED71A5FDB551}"/>
               </a:ext>
             </a:extLst>
           </p:cNvPr>
@@ -11428,7 +11285,7 @@
           <p:cNvPr id="4" name="">
             <a:extLst xmlns:a="http://schemas.openxmlformats.org/drawingml/2006/main">
               <a:ext uri="{FF2B5EF4-FFF2-40B4-BE49-F238E27FC236}">
-                <a16:creationId xmlns:a16="http://schemas.microsoft.com/office/drawing/2014/main" id="{DC126A66-E316-4F42-B9CB-CAFCACE9A42D}"/>
+                <a16:creationId xmlns:a16="http://schemas.microsoft.com/office/drawing/2014/main" id="{59D34A61-12D2-466B-A120-90D1F5060D2E}"/>
               </a:ext>
             </a:extLst>
           </p:cNvPr>
@@ -11485,7 +11342,7 @@
           <p:cNvPr id="5" name="">
             <a:extLst xmlns:a="http://schemas.openxmlformats.org/drawingml/2006/main">
               <a:ext uri="{FF2B5EF4-FFF2-40B4-BE49-F238E27FC236}">
-                <a16:creationId xmlns:a16="http://schemas.microsoft.com/office/drawing/2014/main" id="{EABAB2B3-0E35-4C64-B9B6-388ED96000DF}"/>
+                <a16:creationId xmlns:a16="http://schemas.microsoft.com/office/drawing/2014/main" id="{CC5A5F53-AF03-47FA-A021-EA401B53543E}"/>
               </a:ext>
             </a:extLst>
           </p:cNvPr>
@@ -11542,7 +11399,7 @@
           <p:cNvPr id="6" name="">
             <a:extLst xmlns:a="http://schemas.openxmlformats.org/drawingml/2006/main">
               <a:ext uri="{FF2B5EF4-FFF2-40B4-BE49-F238E27FC236}">
-                <a16:creationId xmlns:a16="http://schemas.microsoft.com/office/drawing/2014/main" id="{FBD3D549-EBAC-4018-A7DF-48EB616772C3}"/>
+                <a16:creationId xmlns:a16="http://schemas.microsoft.com/office/drawing/2014/main" id="{BB6D2BCD-19C0-44AA-BB13-39068AC06B39}"/>
               </a:ext>
             </a:extLst>
           </p:cNvPr>
@@ -11599,7 +11456,7 @@
           <p:cNvPr id="7" name="">
             <a:extLst xmlns:a="http://schemas.openxmlformats.org/drawingml/2006/main">
               <a:ext uri="{FF2B5EF4-FFF2-40B4-BE49-F238E27FC236}">
-                <a16:creationId xmlns:a16="http://schemas.microsoft.com/office/drawing/2014/main" id="{8237D98E-71CD-4CB7-92AF-66C0F43B6993}"/>
+                <a16:creationId xmlns:a16="http://schemas.microsoft.com/office/drawing/2014/main" id="{2732E184-116B-4B4C-946C-1ADDF3FB06A4}"/>
               </a:ext>
             </a:extLst>
           </p:cNvPr>
@@ -11631,7 +11488,7 @@
           <p:cNvPr id="8" name="">
             <a:extLst xmlns:a="http://schemas.openxmlformats.org/drawingml/2006/main">
               <a:ext uri="{FF2B5EF4-FFF2-40B4-BE49-F238E27FC236}">
-                <a16:creationId xmlns:a16="http://schemas.microsoft.com/office/drawing/2014/main" id="{C9974BB9-7AD7-4EF5-9465-3BF09E73E68F}"/>
+                <a16:creationId xmlns:a16="http://schemas.microsoft.com/office/drawing/2014/main" id="{1D38520B-B01C-4FCD-ABCA-7DB45D2B8581}"/>
               </a:ext>
             </a:extLst>
           </p:cNvPr>
@@ -11688,7 +11545,7 @@
           <p:cNvPr id="9" name="">
             <a:extLst xmlns:a="http://schemas.openxmlformats.org/drawingml/2006/main">
               <a:ext uri="{FF2B5EF4-FFF2-40B4-BE49-F238E27FC236}">
-                <a16:creationId xmlns:a16="http://schemas.microsoft.com/office/drawing/2014/main" id="{B3AB2D1A-26D7-4920-B2E9-89D9FBA4192C}"/>
+                <a16:creationId xmlns:a16="http://schemas.microsoft.com/office/drawing/2014/main" id="{4D46AF2E-A153-4B77-8CCD-7084FC33617A}"/>
               </a:ext>
             </a:extLst>
           </p:cNvPr>
@@ -11749,7 +11606,7 @@
           <p:nvPr/>
         </p:nvPicPr>
         <p:blipFill>
-          <a:blip xmlns:r="http://schemas.openxmlformats.org/officeDocument/2006/relationships" xmlns:a="http://schemas.openxmlformats.org/drawingml/2006/main" r:embed="Rfa9d893ce8dd4977"/>
+          <a:blip xmlns:r="http://schemas.openxmlformats.org/officeDocument/2006/relationships" xmlns:a="http://schemas.openxmlformats.org/drawingml/2006/main" r:embed="R5e63a4b35c3c492f"/>
           <a:stretch xmlns:a="http://schemas.openxmlformats.org/drawingml/2006/main"/>
         </p:blipFill>
         <p:spPr>
@@ -11767,7 +11624,7 @@
           <p:cNvPr id="11" name="">
             <a:extLst xmlns:a="http://schemas.openxmlformats.org/drawingml/2006/main">
               <a:ext uri="{FF2B5EF4-FFF2-40B4-BE49-F238E27FC236}">
-                <a16:creationId xmlns:a16="http://schemas.microsoft.com/office/drawing/2014/main" id="{6D2F4A46-B14A-431B-9FBD-D8C45DCABBE5}"/>
+                <a16:creationId xmlns:a16="http://schemas.microsoft.com/office/drawing/2014/main" id="{B8BB6968-181B-47D2-8A79-E70B9F731527}"/>
               </a:ext>
             </a:extLst>
           </p:cNvPr>
@@ -11824,7 +11681,7 @@
           <p:cNvPr id="12" name="">
             <a:extLst xmlns:a="http://schemas.openxmlformats.org/drawingml/2006/main">
               <a:ext uri="{FF2B5EF4-FFF2-40B4-BE49-F238E27FC236}">
-                <a16:creationId xmlns:a16="http://schemas.microsoft.com/office/drawing/2014/main" id="{D6FB9C9D-0934-41D7-A741-75FB2C77F581}"/>
+                <a16:creationId xmlns:a16="http://schemas.microsoft.com/office/drawing/2014/main" id="{9ADE38FB-21A0-4912-B750-D400F5E0FD3A}"/>
               </a:ext>
             </a:extLst>
           </p:cNvPr>
@@ -11881,7 +11738,7 @@
           <p:cNvPr id="13" name="">
             <a:extLst xmlns:a="http://schemas.openxmlformats.org/drawingml/2006/main">
               <a:ext uri="{FF2B5EF4-FFF2-40B4-BE49-F238E27FC236}">
-                <a16:creationId xmlns:a16="http://schemas.microsoft.com/office/drawing/2014/main" id="{6F9CB7CF-6B5A-434E-B67A-913EE2E8E5B5}"/>
+                <a16:creationId xmlns:a16="http://schemas.microsoft.com/office/drawing/2014/main" id="{4459DD9C-6411-4D19-B7C6-BADD581D49BD}"/>
               </a:ext>
             </a:extLst>
           </p:cNvPr>
@@ -11913,7 +11770,7 @@
           <p:cNvPr id="14" name="">
             <a:extLst xmlns:a="http://schemas.openxmlformats.org/drawingml/2006/main">
               <a:ext uri="{FF2B5EF4-FFF2-40B4-BE49-F238E27FC236}">
-                <a16:creationId xmlns:a16="http://schemas.microsoft.com/office/drawing/2014/main" id="{E7FC05CB-8875-4CD0-BAFC-B762F675D3D2}"/>
+                <a16:creationId xmlns:a16="http://schemas.microsoft.com/office/drawing/2014/main" id="{9090F09B-F5E5-41A0-80DF-775EE30951AE}"/>
               </a:ext>
             </a:extLst>
           </p:cNvPr>
@@ -11970,7 +11827,7 @@
           <p:cNvPr id="15" name="">
             <a:extLst xmlns:a="http://schemas.openxmlformats.org/drawingml/2006/main">
               <a:ext uri="{FF2B5EF4-FFF2-40B4-BE49-F238E27FC236}">
-                <a16:creationId xmlns:a16="http://schemas.microsoft.com/office/drawing/2014/main" id="{F929CDD4-8DAF-448B-B9DB-017950E02747}"/>
+                <a16:creationId xmlns:a16="http://schemas.microsoft.com/office/drawing/2014/main" id="{B304F578-35BA-4C0C-96F4-8AC9F1407A75}"/>
               </a:ext>
             </a:extLst>
           </p:cNvPr>
@@ -12025,7 +11882,7 @@
     </p:spTree>
     <p:extLst>
       <p:ext uri="{BB962C8B-B14F-4D97-AF65-F5344CB8AC3E}">
-        <p14:creationId xmlns:p14="http://schemas.microsoft.com/office/powerpoint/2010/main" val="1792647756"/>
+        <p14:creationId xmlns:p14="http://schemas.microsoft.com/office/powerpoint/2010/main" val="54721925"/>
       </p:ext>
     </p:extLst>
   </p:cSld>
@@ -12180,7 +12037,7 @@
           <p:cNvPr id="23" name="">
             <a:extLst xmlns:a="http://schemas.openxmlformats.org/drawingml/2006/main">
               <a:ext uri="{FF2B5EF4-FFF2-40B4-BE49-F238E27FC236}">
-                <a16:creationId xmlns:a16="http://schemas.microsoft.com/office/drawing/2014/main" id="{84B17A3E-91D8-4DD9-92DE-66D7120C1428}"/>
+                <a16:creationId xmlns:a16="http://schemas.microsoft.com/office/drawing/2014/main" id="{7A684DE0-DB90-49EF-B773-78213FD4C1FB}"/>
               </a:ext>
             </a:extLst>
           </p:cNvPr>
@@ -12212,7 +12069,7 @@
           <p:cNvPr id="2" name="">
             <a:extLst xmlns:a="http://schemas.openxmlformats.org/drawingml/2006/main">
               <a:ext uri="{FF2B5EF4-FFF2-40B4-BE49-F238E27FC236}">
-                <a16:creationId xmlns:a16="http://schemas.microsoft.com/office/drawing/2014/main" id="{CBB9FEF7-F7E6-405A-B8AD-455EAF7DC912}"/>
+                <a16:creationId xmlns:a16="http://schemas.microsoft.com/office/drawing/2014/main" id="{CCCEEC52-46AA-4671-9A22-40E282B6B9A8}"/>
               </a:ext>
             </a:extLst>
           </p:cNvPr>
@@ -12269,7 +12126,7 @@
           <p:cNvPr id="3" name="">
             <a:extLst xmlns:a="http://schemas.openxmlformats.org/drawingml/2006/main">
               <a:ext uri="{FF2B5EF4-FFF2-40B4-BE49-F238E27FC236}">
-                <a16:creationId xmlns:a16="http://schemas.microsoft.com/office/drawing/2014/main" id="{933BA3B9-7326-457C-BDEB-C2EAE9E86143}"/>
+                <a16:creationId xmlns:a16="http://schemas.microsoft.com/office/drawing/2014/main" id="{B155DA98-06ED-4179-95DA-12211BF076ED}"/>
               </a:ext>
             </a:extLst>
           </p:cNvPr>
@@ -12301,7 +12158,7 @@
           <p:cNvPr id="4" name="">
             <a:extLst xmlns:a="http://schemas.openxmlformats.org/drawingml/2006/main">
               <a:ext uri="{FF2B5EF4-FFF2-40B4-BE49-F238E27FC236}">
-                <a16:creationId xmlns:a16="http://schemas.microsoft.com/office/drawing/2014/main" id="{94720423-57CE-4E6A-BB83-4E0457A88B42}"/>
+                <a16:creationId xmlns:a16="http://schemas.microsoft.com/office/drawing/2014/main" id="{4C449ABC-CE17-4CC9-8A57-697EF4348257}"/>
               </a:ext>
             </a:extLst>
           </p:cNvPr>
@@ -12358,7 +12215,7 @@
           <p:cNvPr id="5" name="">
             <a:extLst xmlns:a="http://schemas.openxmlformats.org/drawingml/2006/main">
               <a:ext uri="{FF2B5EF4-FFF2-40B4-BE49-F238E27FC236}">
-                <a16:creationId xmlns:a16="http://schemas.microsoft.com/office/drawing/2014/main" id="{98375088-6186-4D0B-A284-F0AE150E1A6A}"/>
+                <a16:creationId xmlns:a16="http://schemas.microsoft.com/office/drawing/2014/main" id="{9683BE1D-6BCD-471E-B391-937B4C291049}"/>
               </a:ext>
             </a:extLst>
           </p:cNvPr>
@@ -12415,7 +12272,7 @@
           <p:cNvPr id="6" name="">
             <a:extLst xmlns:a="http://schemas.openxmlformats.org/drawingml/2006/main">
               <a:ext uri="{FF2B5EF4-FFF2-40B4-BE49-F238E27FC236}">
-                <a16:creationId xmlns:a16="http://schemas.microsoft.com/office/drawing/2014/main" id="{41907B5D-A77D-481C-9457-6E0ECA534391}"/>
+                <a16:creationId xmlns:a16="http://schemas.microsoft.com/office/drawing/2014/main" id="{52503CDE-EE63-4FDF-AC4C-A0472B32777E}"/>
               </a:ext>
             </a:extLst>
           </p:cNvPr>
@@ -12472,7 +12329,7 @@
           <p:cNvPr id="7" name="">
             <a:extLst xmlns:a="http://schemas.openxmlformats.org/drawingml/2006/main">
               <a:ext uri="{FF2B5EF4-FFF2-40B4-BE49-F238E27FC236}">
-                <a16:creationId xmlns:a16="http://schemas.microsoft.com/office/drawing/2014/main" id="{00407DFC-ECA7-4784-9EEE-E406C6C1828D}"/>
+                <a16:creationId xmlns:a16="http://schemas.microsoft.com/office/drawing/2014/main" id="{7FD88244-2269-4ECC-8961-69F5D79346E6}"/>
               </a:ext>
             </a:extLst>
           </p:cNvPr>
@@ -12504,7 +12361,7 @@
           <p:cNvPr id="8" name="">
             <a:extLst xmlns:a="http://schemas.openxmlformats.org/drawingml/2006/main">
               <a:ext uri="{FF2B5EF4-FFF2-40B4-BE49-F238E27FC236}">
-                <a16:creationId xmlns:a16="http://schemas.microsoft.com/office/drawing/2014/main" id="{18998661-3455-48C6-A1B9-339665B6F32A}"/>
+                <a16:creationId xmlns:a16="http://schemas.microsoft.com/office/drawing/2014/main" id="{7BBF76D6-9008-45A9-A127-B630D677FD79}"/>
               </a:ext>
             </a:extLst>
           </p:cNvPr>
@@ -12561,7 +12418,7 @@
           <p:cNvPr id="9" name="">
             <a:extLst xmlns:a="http://schemas.openxmlformats.org/drawingml/2006/main">
               <a:ext uri="{FF2B5EF4-FFF2-40B4-BE49-F238E27FC236}">
-                <a16:creationId xmlns:a16="http://schemas.microsoft.com/office/drawing/2014/main" id="{7500B7E2-ED27-4819-B56B-D25A8DF4F536}"/>
+                <a16:creationId xmlns:a16="http://schemas.microsoft.com/office/drawing/2014/main" id="{225FADF7-47A0-486A-9396-09734655CACF}"/>
               </a:ext>
             </a:extLst>
           </p:cNvPr>
@@ -12618,7 +12475,7 @@
           <p:cNvPr id="10" name="">
             <a:extLst xmlns:a="http://schemas.openxmlformats.org/drawingml/2006/main">
               <a:ext uri="{FF2B5EF4-FFF2-40B4-BE49-F238E27FC236}">
-                <a16:creationId xmlns:a16="http://schemas.microsoft.com/office/drawing/2014/main" id="{80D8B536-9EFF-4D47-97FF-AEA8139203B8}"/>
+                <a16:creationId xmlns:a16="http://schemas.microsoft.com/office/drawing/2014/main" id="{79670F16-F5F5-4C8B-B8A1-B4BDFF3E57DE}"/>
               </a:ext>
             </a:extLst>
           </p:cNvPr>
@@ -12652,7 +12509,7 @@
           <p:cNvPr id="11" name="">
             <a:extLst xmlns:a="http://schemas.openxmlformats.org/drawingml/2006/main">
               <a:ext uri="{FF2B5EF4-FFF2-40B4-BE49-F238E27FC236}">
-                <a16:creationId xmlns:a16="http://schemas.microsoft.com/office/drawing/2014/main" id="{A8CA187B-5B52-4795-BD9D-65AD6398F2CB}"/>
+                <a16:creationId xmlns:a16="http://schemas.microsoft.com/office/drawing/2014/main" id="{FEC339B2-B935-4E2D-A1CC-1EDA00096509}"/>
               </a:ext>
             </a:extLst>
           </p:cNvPr>
@@ -12684,7 +12541,7 @@
           <p:cNvPr id="12" name="">
             <a:extLst xmlns:a="http://schemas.openxmlformats.org/drawingml/2006/main">
               <a:ext uri="{FF2B5EF4-FFF2-40B4-BE49-F238E27FC236}">
-                <a16:creationId xmlns:a16="http://schemas.microsoft.com/office/drawing/2014/main" id="{31FE7FA3-8DC1-4436-9091-BA369A95332A}"/>
+                <a16:creationId xmlns:a16="http://schemas.microsoft.com/office/drawing/2014/main" id="{FEF5FE28-3207-49DC-886D-70ECBB0F3CB5}"/>
               </a:ext>
             </a:extLst>
           </p:cNvPr>
@@ -12741,7 +12598,7 @@
           <p:cNvPr id="13" name="">
             <a:extLst xmlns:a="http://schemas.openxmlformats.org/drawingml/2006/main">
               <a:ext uri="{FF2B5EF4-FFF2-40B4-BE49-F238E27FC236}">
-                <a16:creationId xmlns:a16="http://schemas.microsoft.com/office/drawing/2014/main" id="{561069B9-4A21-4907-9445-8715B79AE98B}"/>
+                <a16:creationId xmlns:a16="http://schemas.microsoft.com/office/drawing/2014/main" id="{509A20A5-E97C-4F92-9A9D-FC9C237D5F49}"/>
               </a:ext>
             </a:extLst>
           </p:cNvPr>
@@ -12798,7 +12655,7 @@
           <p:cNvPr id="14" name="">
             <a:extLst xmlns:a="http://schemas.openxmlformats.org/drawingml/2006/main">
               <a:ext uri="{FF2B5EF4-FFF2-40B4-BE49-F238E27FC236}">
-                <a16:creationId xmlns:a16="http://schemas.microsoft.com/office/drawing/2014/main" id="{439D1638-7CF3-43CA-91CB-FFC172AD5A3D}"/>
+                <a16:creationId xmlns:a16="http://schemas.microsoft.com/office/drawing/2014/main" id="{FE1B5B38-27A5-47A2-848A-ECA0084EBB8C}"/>
               </a:ext>
             </a:extLst>
           </p:cNvPr>
@@ -12832,7 +12689,7 @@
           <p:cNvPr id="15" name="">
             <a:extLst xmlns:a="http://schemas.openxmlformats.org/drawingml/2006/main">
               <a:ext uri="{FF2B5EF4-FFF2-40B4-BE49-F238E27FC236}">
-                <a16:creationId xmlns:a16="http://schemas.microsoft.com/office/drawing/2014/main" id="{7DD22652-D00D-47BA-9784-EA9F6D1043D2}"/>
+                <a16:creationId xmlns:a16="http://schemas.microsoft.com/office/drawing/2014/main" id="{4ABACB05-9173-40FA-9949-F1F85B3D51F0}"/>
               </a:ext>
             </a:extLst>
           </p:cNvPr>
@@ -12864,7 +12721,7 @@
           <p:cNvPr id="16" name="">
             <a:extLst xmlns:a="http://schemas.openxmlformats.org/drawingml/2006/main">
               <a:ext uri="{FF2B5EF4-FFF2-40B4-BE49-F238E27FC236}">
-                <a16:creationId xmlns:a16="http://schemas.microsoft.com/office/drawing/2014/main" id="{CB402073-2FC8-41A6-B943-9C8D37A4788C}"/>
+                <a16:creationId xmlns:a16="http://schemas.microsoft.com/office/drawing/2014/main" id="{85896199-5E19-4E9C-B36B-E78EAD3139CD}"/>
               </a:ext>
             </a:extLst>
           </p:cNvPr>
@@ -12921,7 +12778,7 @@
           <p:cNvPr id="17" name="">
             <a:extLst xmlns:a="http://schemas.openxmlformats.org/drawingml/2006/main">
               <a:ext uri="{FF2B5EF4-FFF2-40B4-BE49-F238E27FC236}">
-                <a16:creationId xmlns:a16="http://schemas.microsoft.com/office/drawing/2014/main" id="{FBF4DCE1-3FC6-4272-87BD-04A74579AB44}"/>
+                <a16:creationId xmlns:a16="http://schemas.microsoft.com/office/drawing/2014/main" id="{3F1DE365-7909-4255-B4BC-79EDA98B6690}"/>
               </a:ext>
             </a:extLst>
           </p:cNvPr>
@@ -12978,7 +12835,7 @@
           <p:cNvPr id="18" name="">
             <a:extLst xmlns:a="http://schemas.openxmlformats.org/drawingml/2006/main">
               <a:ext uri="{FF2B5EF4-FFF2-40B4-BE49-F238E27FC236}">
-                <a16:creationId xmlns:a16="http://schemas.microsoft.com/office/drawing/2014/main" id="{FD5A08C7-E3C3-4FDE-8E0A-9A06B2D8136E}"/>
+                <a16:creationId xmlns:a16="http://schemas.microsoft.com/office/drawing/2014/main" id="{47512097-46FC-4756-8C7F-8630711B9457}"/>
               </a:ext>
             </a:extLst>
           </p:cNvPr>
@@ -13012,7 +12869,7 @@
           <p:cNvPr id="19" name="">
             <a:extLst xmlns:a="http://schemas.openxmlformats.org/drawingml/2006/main">
               <a:ext uri="{FF2B5EF4-FFF2-40B4-BE49-F238E27FC236}">
-                <a16:creationId xmlns:a16="http://schemas.microsoft.com/office/drawing/2014/main" id="{C924D798-F864-4575-A33B-86F2F8344364}"/>
+                <a16:creationId xmlns:a16="http://schemas.microsoft.com/office/drawing/2014/main" id="{7ED16578-CB2A-4806-BF80-094AA4DE77AA}"/>
               </a:ext>
             </a:extLst>
           </p:cNvPr>
@@ -13044,7 +12901,7 @@
           <p:cNvPr id="20" name="">
             <a:extLst xmlns:a="http://schemas.openxmlformats.org/drawingml/2006/main">
               <a:ext uri="{FF2B5EF4-FFF2-40B4-BE49-F238E27FC236}">
-                <a16:creationId xmlns:a16="http://schemas.microsoft.com/office/drawing/2014/main" id="{FD08BDB1-81CD-44FA-ABAD-EAC7D188C316}"/>
+                <a16:creationId xmlns:a16="http://schemas.microsoft.com/office/drawing/2014/main" id="{3527E516-7ECC-425D-B4E9-0EF7AF7395FA}"/>
               </a:ext>
             </a:extLst>
           </p:cNvPr>
@@ -13101,7 +12958,7 @@
           <p:cNvPr id="21" name="">
             <a:extLst xmlns:a="http://schemas.openxmlformats.org/drawingml/2006/main">
               <a:ext uri="{FF2B5EF4-FFF2-40B4-BE49-F238E27FC236}">
-                <a16:creationId xmlns:a16="http://schemas.microsoft.com/office/drawing/2014/main" id="{62BA0F75-B6BB-4757-A902-CC53AF5B91A1}"/>
+                <a16:creationId xmlns:a16="http://schemas.microsoft.com/office/drawing/2014/main" id="{7ABC4995-F9DA-4F5F-9600-7579F37C8758}"/>
               </a:ext>
             </a:extLst>
           </p:cNvPr>
@@ -13158,7 +13015,7 @@
           <p:cNvPr id="22" name="">
             <a:extLst xmlns:a="http://schemas.openxmlformats.org/drawingml/2006/main">
               <a:ext uri="{FF2B5EF4-FFF2-40B4-BE49-F238E27FC236}">
-                <a16:creationId xmlns:a16="http://schemas.microsoft.com/office/drawing/2014/main" id="{54E72995-FC28-44A1-BB00-2C4A75677B8C}"/>
+                <a16:creationId xmlns:a16="http://schemas.microsoft.com/office/drawing/2014/main" id="{2B05B556-BD78-4F32-80BB-B1A064A3289F}"/>
               </a:ext>
             </a:extLst>
           </p:cNvPr>
@@ -13213,7 +13070,7 @@
     </p:spTree>
     <p:extLst>
       <p:ext uri="{BB962C8B-B14F-4D97-AF65-F5344CB8AC3E}">
-        <p14:creationId xmlns:p14="http://schemas.microsoft.com/office/powerpoint/2010/main" val="141836139"/>
+        <p14:creationId xmlns:p14="http://schemas.microsoft.com/office/powerpoint/2010/main" val="1684534828"/>
       </p:ext>
     </p:extLst>
   </p:cSld>
@@ -13414,7 +13271,7 @@
           <p:cNvPr id="22" name="">
             <a:extLst xmlns:a="http://schemas.openxmlformats.org/drawingml/2006/main">
               <a:ext uri="{FF2B5EF4-FFF2-40B4-BE49-F238E27FC236}">
-                <a16:creationId xmlns:a16="http://schemas.microsoft.com/office/drawing/2014/main" id="{C9A5E738-22F5-47A2-9905-5FE90A0F1834}"/>
+                <a16:creationId xmlns:a16="http://schemas.microsoft.com/office/drawing/2014/main" id="{A7D6503E-E9D3-4C24-AE6A-FC208AF6EA8A}"/>
               </a:ext>
             </a:extLst>
           </p:cNvPr>
@@ -13446,7 +13303,7 @@
           <p:cNvPr id="2" name="">
             <a:extLst xmlns:a="http://schemas.openxmlformats.org/drawingml/2006/main">
               <a:ext uri="{FF2B5EF4-FFF2-40B4-BE49-F238E27FC236}">
-                <a16:creationId xmlns:a16="http://schemas.microsoft.com/office/drawing/2014/main" id="{33557F56-013D-4EC6-BB88-2827ACAF45AB}"/>
+                <a16:creationId xmlns:a16="http://schemas.microsoft.com/office/drawing/2014/main" id="{18AD39D9-158C-4A0D-9839-BC140309A06B}"/>
               </a:ext>
             </a:extLst>
           </p:cNvPr>
@@ -13503,7 +13360,7 @@
           <p:cNvPr id="3" name="">
             <a:extLst xmlns:a="http://schemas.openxmlformats.org/drawingml/2006/main">
               <a:ext uri="{FF2B5EF4-FFF2-40B4-BE49-F238E27FC236}">
-                <a16:creationId xmlns:a16="http://schemas.microsoft.com/office/drawing/2014/main" id="{9787E797-A09C-4E93-9304-701576B3B3F9}"/>
+                <a16:creationId xmlns:a16="http://schemas.microsoft.com/office/drawing/2014/main" id="{112B5191-4ED3-4C89-9136-5053F18B4618}"/>
               </a:ext>
             </a:extLst>
           </p:cNvPr>
@@ -13535,7 +13392,7 @@
           <p:cNvPr id="4" name="">
             <a:extLst xmlns:a="http://schemas.openxmlformats.org/drawingml/2006/main">
               <a:ext uri="{FF2B5EF4-FFF2-40B4-BE49-F238E27FC236}">
-                <a16:creationId xmlns:a16="http://schemas.microsoft.com/office/drawing/2014/main" id="{EDA49CF6-30C9-4F7F-8D57-9BAF91E761B6}"/>
+                <a16:creationId xmlns:a16="http://schemas.microsoft.com/office/drawing/2014/main" id="{6B0E29A2-30EB-479C-9C58-F460D33D6463}"/>
               </a:ext>
             </a:extLst>
           </p:cNvPr>
@@ -13592,7 +13449,7 @@
           <p:cNvPr id="5" name="">
             <a:extLst xmlns:a="http://schemas.openxmlformats.org/drawingml/2006/main">
               <a:ext uri="{FF2B5EF4-FFF2-40B4-BE49-F238E27FC236}">
-                <a16:creationId xmlns:a16="http://schemas.microsoft.com/office/drawing/2014/main" id="{E7C34DC4-E50C-4C5C-B367-57FE434F999C}"/>
+                <a16:creationId xmlns:a16="http://schemas.microsoft.com/office/drawing/2014/main" id="{D14ED81E-945B-4352-A5FF-D08D3BA2953B}"/>
               </a:ext>
             </a:extLst>
           </p:cNvPr>
@@ -13649,7 +13506,7 @@
           <p:cNvPr id="6" name="">
             <a:extLst xmlns:a="http://schemas.openxmlformats.org/drawingml/2006/main">
               <a:ext uri="{FF2B5EF4-FFF2-40B4-BE49-F238E27FC236}">
-                <a16:creationId xmlns:a16="http://schemas.microsoft.com/office/drawing/2014/main" id="{C1F109F0-98C0-4276-84BC-3B7361DB7ECB}"/>
+                <a16:creationId xmlns:a16="http://schemas.microsoft.com/office/drawing/2014/main" id="{B28D8E5A-6222-4319-877B-F98721670E57}"/>
               </a:ext>
             </a:extLst>
           </p:cNvPr>
@@ -13706,7 +13563,7 @@
           <p:cNvPr id="7" name="">
             <a:extLst xmlns:a="http://schemas.openxmlformats.org/drawingml/2006/main">
               <a:ext uri="{FF2B5EF4-FFF2-40B4-BE49-F238E27FC236}">
-                <a16:creationId xmlns:a16="http://schemas.microsoft.com/office/drawing/2014/main" id="{9F9443F1-4E53-4332-943E-8E18A51E02E7}"/>
+                <a16:creationId xmlns:a16="http://schemas.microsoft.com/office/drawing/2014/main" id="{B63EF7FB-4895-443A-A440-48A43FB62FB5}"/>
               </a:ext>
             </a:extLst>
           </p:cNvPr>
@@ -13738,7 +13595,7 @@
           <p:cNvPr id="8" name="">
             <a:extLst xmlns:a="http://schemas.openxmlformats.org/drawingml/2006/main">
               <a:ext uri="{FF2B5EF4-FFF2-40B4-BE49-F238E27FC236}">
-                <a16:creationId xmlns:a16="http://schemas.microsoft.com/office/drawing/2014/main" id="{71A63421-FDCB-4D38-B4EC-1B30F66377DB}"/>
+                <a16:creationId xmlns:a16="http://schemas.microsoft.com/office/drawing/2014/main" id="{66AA4C93-03EF-476D-9760-1F26C5092264}"/>
               </a:ext>
             </a:extLst>
           </p:cNvPr>
@@ -13795,7 +13652,7 @@
           <p:cNvPr id="9" name="">
             <a:extLst xmlns:a="http://schemas.openxmlformats.org/drawingml/2006/main">
               <a:ext uri="{FF2B5EF4-FFF2-40B4-BE49-F238E27FC236}">
-                <a16:creationId xmlns:a16="http://schemas.microsoft.com/office/drawing/2014/main" id="{3B1996BE-74A8-4DEE-96FC-C63916421B03}"/>
+                <a16:creationId xmlns:a16="http://schemas.microsoft.com/office/drawing/2014/main" id="{4714E563-41F2-46BB-A184-8F21149F773D}"/>
               </a:ext>
             </a:extLst>
           </p:cNvPr>
@@ -13852,7 +13709,7 @@
           <p:cNvPr id="10" name="">
             <a:extLst xmlns:a="http://schemas.openxmlformats.org/drawingml/2006/main">
               <a:ext uri="{FF2B5EF4-FFF2-40B4-BE49-F238E27FC236}">
-                <a16:creationId xmlns:a16="http://schemas.microsoft.com/office/drawing/2014/main" id="{1E079402-7603-4C02-9DF3-BB38DA1E8585}"/>
+                <a16:creationId xmlns:a16="http://schemas.microsoft.com/office/drawing/2014/main" id="{7B4BAC67-3521-48D4-B8F1-DC95F055812E}"/>
               </a:ext>
             </a:extLst>
           </p:cNvPr>
@@ -13886,7 +13743,7 @@
           <p:cNvPr id="11" name="">
             <a:extLst xmlns:a="http://schemas.openxmlformats.org/drawingml/2006/main">
               <a:ext uri="{FF2B5EF4-FFF2-40B4-BE49-F238E27FC236}">
-                <a16:creationId xmlns:a16="http://schemas.microsoft.com/office/drawing/2014/main" id="{2DD06641-ADED-4AE3-A688-EFA98053419E}"/>
+                <a16:creationId xmlns:a16="http://schemas.microsoft.com/office/drawing/2014/main" id="{3B58E42F-8452-4499-80D3-DC7FABFB3F52}"/>
               </a:ext>
             </a:extLst>
           </p:cNvPr>
@@ -13918,7 +13775,7 @@
           <p:cNvPr id="12" name="">
             <a:extLst xmlns:a="http://schemas.openxmlformats.org/drawingml/2006/main">
               <a:ext uri="{FF2B5EF4-FFF2-40B4-BE49-F238E27FC236}">
-                <a16:creationId xmlns:a16="http://schemas.microsoft.com/office/drawing/2014/main" id="{5FCD9DCB-840D-4251-8450-33B67B99537C}"/>
+                <a16:creationId xmlns:a16="http://schemas.microsoft.com/office/drawing/2014/main" id="{11F63277-5C8B-4D9A-9E27-E4CA26A167FE}"/>
               </a:ext>
             </a:extLst>
           </p:cNvPr>
@@ -13975,7 +13832,7 @@
           <p:cNvPr id="13" name="">
             <a:extLst xmlns:a="http://schemas.openxmlformats.org/drawingml/2006/main">
               <a:ext uri="{FF2B5EF4-FFF2-40B4-BE49-F238E27FC236}">
-                <a16:creationId xmlns:a16="http://schemas.microsoft.com/office/drawing/2014/main" id="{7CC0787F-ECD3-4390-90EE-20A23A5355CC}"/>
+                <a16:creationId xmlns:a16="http://schemas.microsoft.com/office/drawing/2014/main" id="{0692B5E2-E5D5-4E88-AB71-B8EE6922962F}"/>
               </a:ext>
             </a:extLst>
           </p:cNvPr>
@@ -14032,7 +13889,7 @@
           <p:cNvPr id="14" name="">
             <a:extLst xmlns:a="http://schemas.openxmlformats.org/drawingml/2006/main">
               <a:ext uri="{FF2B5EF4-FFF2-40B4-BE49-F238E27FC236}">
-                <a16:creationId xmlns:a16="http://schemas.microsoft.com/office/drawing/2014/main" id="{32468F8C-FE71-4545-B415-E281D0114245}"/>
+                <a16:creationId xmlns:a16="http://schemas.microsoft.com/office/drawing/2014/main" id="{1E345C51-1F53-4448-ABE3-8D72A77E75F0}"/>
               </a:ext>
             </a:extLst>
           </p:cNvPr>
@@ -14066,7 +13923,7 @@
           <p:cNvPr id="15" name="">
             <a:extLst xmlns:a="http://schemas.openxmlformats.org/drawingml/2006/main">
               <a:ext uri="{FF2B5EF4-FFF2-40B4-BE49-F238E27FC236}">
-                <a16:creationId xmlns:a16="http://schemas.microsoft.com/office/drawing/2014/main" id="{0545A4E4-00DF-49BA-B51A-4EA6BD6145D6}"/>
+                <a16:creationId xmlns:a16="http://schemas.microsoft.com/office/drawing/2014/main" id="{5DA45AA9-1B62-42FD-B944-E93A23B843DC}"/>
               </a:ext>
             </a:extLst>
           </p:cNvPr>
@@ -14098,7 +13955,7 @@
           <p:cNvPr id="16" name="">
             <a:extLst xmlns:a="http://schemas.openxmlformats.org/drawingml/2006/main">
               <a:ext uri="{FF2B5EF4-FFF2-40B4-BE49-F238E27FC236}">
-                <a16:creationId xmlns:a16="http://schemas.microsoft.com/office/drawing/2014/main" id="{209535FB-158E-468B-A8E8-1A3475B09ED8}"/>
+                <a16:creationId xmlns:a16="http://schemas.microsoft.com/office/drawing/2014/main" id="{F0527AF6-9D82-44F0-9623-094F8AD3FC19}"/>
               </a:ext>
             </a:extLst>
           </p:cNvPr>
@@ -14155,7 +14012,7 @@
           <p:cNvPr id="17" name="">
             <a:extLst xmlns:a="http://schemas.openxmlformats.org/drawingml/2006/main">
               <a:ext uri="{FF2B5EF4-FFF2-40B4-BE49-F238E27FC236}">
-                <a16:creationId xmlns:a16="http://schemas.microsoft.com/office/drawing/2014/main" id="{9367B313-BB3F-486E-9863-AFD579FAA1BF}"/>
+                <a16:creationId xmlns:a16="http://schemas.microsoft.com/office/drawing/2014/main" id="{6A6F8C34-06A5-4E67-8133-03A9D85F1184}"/>
               </a:ext>
             </a:extLst>
           </p:cNvPr>
@@ -14212,7 +14069,7 @@
           <p:cNvPr id="18" name="">
             <a:extLst xmlns:a="http://schemas.openxmlformats.org/drawingml/2006/main">
               <a:ext uri="{FF2B5EF4-FFF2-40B4-BE49-F238E27FC236}">
-                <a16:creationId xmlns:a16="http://schemas.microsoft.com/office/drawing/2014/main" id="{46D33515-50FE-44A0-B818-6144B2396651}"/>
+                <a16:creationId xmlns:a16="http://schemas.microsoft.com/office/drawing/2014/main" id="{9D069E3A-21D3-4537-B9EA-B42FF2009602}"/>
               </a:ext>
             </a:extLst>
           </p:cNvPr>
@@ -14246,7 +14103,7 @@
           <p:cNvPr id="19" name="">
             <a:extLst xmlns:a="http://schemas.openxmlformats.org/drawingml/2006/main">
               <a:ext uri="{FF2B5EF4-FFF2-40B4-BE49-F238E27FC236}">
-                <a16:creationId xmlns:a16="http://schemas.microsoft.com/office/drawing/2014/main" id="{ADD7ECED-286F-420F-943F-19DFFF3DE696}"/>
+                <a16:creationId xmlns:a16="http://schemas.microsoft.com/office/drawing/2014/main" id="{23269FB9-0D7D-4BD4-8C1F-54C8D1DF4BAA}"/>
               </a:ext>
             </a:extLst>
           </p:cNvPr>
@@ -14278,7 +14135,7 @@
           <p:cNvPr id="20" name="">
             <a:extLst xmlns:a="http://schemas.openxmlformats.org/drawingml/2006/main">
               <a:ext uri="{FF2B5EF4-FFF2-40B4-BE49-F238E27FC236}">
-                <a16:creationId xmlns:a16="http://schemas.microsoft.com/office/drawing/2014/main" id="{0FF0C933-C261-4477-BCE9-8ED6ADF53FB9}"/>
+                <a16:creationId xmlns:a16="http://schemas.microsoft.com/office/drawing/2014/main" id="{4BCF80E6-3021-4647-AA63-92B7524BD7B4}"/>
               </a:ext>
             </a:extLst>
           </p:cNvPr>
@@ -14335,7 +14192,7 @@
           <p:cNvPr id="21" name="">
             <a:extLst xmlns:a="http://schemas.openxmlformats.org/drawingml/2006/main">
               <a:ext uri="{FF2B5EF4-FFF2-40B4-BE49-F238E27FC236}">
-                <a16:creationId xmlns:a16="http://schemas.microsoft.com/office/drawing/2014/main" id="{97C6D48D-AF52-411F-A005-5CBF99E7AD9F}"/>
+                <a16:creationId xmlns:a16="http://schemas.microsoft.com/office/drawing/2014/main" id="{9672FDDF-2F8C-40CF-A323-15AC6B69F155}"/>
               </a:ext>
             </a:extLst>
           </p:cNvPr>
@@ -14390,7 +14247,7 @@
     </p:spTree>
     <p:extLst>
       <p:ext uri="{BB962C8B-B14F-4D97-AF65-F5344CB8AC3E}">
-        <p14:creationId xmlns:p14="http://schemas.microsoft.com/office/powerpoint/2010/main" val="1613356548"/>
+        <p14:creationId xmlns:p14="http://schemas.microsoft.com/office/powerpoint/2010/main" val="481372406"/>
       </p:ext>
     </p:extLst>
   </p:cSld>
